--- a/tex/figure_scheme.pptx
+++ b/tex/figure_scheme.pptx
@@ -3513,12 +3513,12 @@
   <pc:docChgLst>
     <pc:chgData name="Akira Terui" userId="3f83de79-c81c-43e2-ac56-bbb755c07a02" providerId="ADAL" clId="{02B81203-7BF0-4F96-B65C-8AB01D97A066}"/>
     <pc:docChg chg="undo custSel modSld">
-      <pc:chgData name="Akira Terui" userId="3f83de79-c81c-43e2-ac56-bbb755c07a02" providerId="ADAL" clId="{02B81203-7BF0-4F96-B65C-8AB01D97A066}" dt="2026-07-01T15:52:30.466" v="64" actId="1037"/>
+      <pc:chgData name="Akira Terui" userId="3f83de79-c81c-43e2-ac56-bbb755c07a02" providerId="ADAL" clId="{02B81203-7BF0-4F96-B65C-8AB01D97A066}" dt="2026-07-01T19:13:57.001" v="65" actId="208"/>
       <pc:docMkLst>
         <pc:docMk/>
       </pc:docMkLst>
       <pc:sldChg chg="addSp modSp mod">
-        <pc:chgData name="Akira Terui" userId="3f83de79-c81c-43e2-ac56-bbb755c07a02" providerId="ADAL" clId="{02B81203-7BF0-4F96-B65C-8AB01D97A066}" dt="2026-07-01T15:52:30.466" v="64" actId="1037"/>
+        <pc:chgData name="Akira Terui" userId="3f83de79-c81c-43e2-ac56-bbb755c07a02" providerId="ADAL" clId="{02B81203-7BF0-4F96-B65C-8AB01D97A066}" dt="2026-07-01T19:13:57.001" v="65" actId="208"/>
         <pc:sldMkLst>
           <pc:docMk/>
           <pc:sldMk cId="1909375894" sldId="256"/>
@@ -3681,6 +3681,14 @@
             <pc:docMk/>
             <pc:sldMk cId="1909375894" sldId="256"/>
             <ac:cxnSpMk id="99" creationId="{D9B1EF40-00C5-1819-BCA5-EFD36F949E06}"/>
+          </ac:cxnSpMkLst>
+        </pc:cxnChg>
+        <pc:cxnChg chg="mod">
+          <ac:chgData name="Akira Terui" userId="3f83de79-c81c-43e2-ac56-bbb755c07a02" providerId="ADAL" clId="{02B81203-7BF0-4F96-B65C-8AB01D97A066}" dt="2026-07-01T19:13:57.001" v="65" actId="208"/>
+          <ac:cxnSpMkLst>
+            <pc:docMk/>
+            <pc:sldMk cId="1909375894" sldId="256"/>
+            <ac:cxnSpMk id="220" creationId="{9FF1A1A1-5ECF-517D-958A-C21AC141A108}"/>
           </ac:cxnSpMkLst>
         </pc:cxnChg>
       </pc:sldChg>
@@ -10635,9 +10643,7 @@
                 </a:prstGeom>
                 <a:ln cap="rnd">
                   <a:solidFill>
-                    <a:schemeClr val="bg1">
-                      <a:lumMod val="75000"/>
-                    </a:schemeClr>
+                    <a:srgbClr val="A6A6A6"/>
                   </a:solidFill>
                 </a:ln>
               </p:spPr>

--- a/tex/figure_scheme.pptx
+++ b/tex/figure_scheme.pptx
@@ -136,18 +136,18 @@
   <pc:docChgLst>
     <pc:chgData name="Akira Terui" userId="3f83de79-c81c-43e2-ac56-bbb755c07a02" providerId="ADAL" clId="{4101542E-66A9-4306-BD0F-EFC5C6C97C63}"/>
     <pc:docChg chg="undo custSel addSld delSld modSld modMainMaster">
-      <pc:chgData name="Akira Terui" userId="3f83de79-c81c-43e2-ac56-bbb755c07a02" providerId="ADAL" clId="{4101542E-66A9-4306-BD0F-EFC5C6C97C63}" dt="2026-07-04T03:44:32.722" v="1263" actId="12789"/>
+      <pc:chgData name="Akira Terui" userId="3f83de79-c81c-43e2-ac56-bbb755c07a02" providerId="ADAL" clId="{4101542E-66A9-4306-BD0F-EFC5C6C97C63}" dt="2026-07-04T03:56:37.108" v="1264" actId="552"/>
       <pc:docMkLst>
         <pc:docMk/>
       </pc:docMkLst>
       <pc:sldChg chg="addSp delSp modSp mod">
-        <pc:chgData name="Akira Terui" userId="3f83de79-c81c-43e2-ac56-bbb755c07a02" providerId="ADAL" clId="{4101542E-66A9-4306-BD0F-EFC5C6C97C63}" dt="2026-07-04T03:44:32.722" v="1263" actId="12789"/>
+        <pc:chgData name="Akira Terui" userId="3f83de79-c81c-43e2-ac56-bbb755c07a02" providerId="ADAL" clId="{4101542E-66A9-4306-BD0F-EFC5C6C97C63}" dt="2026-07-04T03:56:37.108" v="1264" actId="552"/>
         <pc:sldMkLst>
           <pc:docMk/>
           <pc:sldMk cId="1909375894" sldId="256"/>
         </pc:sldMkLst>
         <pc:spChg chg="mod">
-          <ac:chgData name="Akira Terui" userId="3f83de79-c81c-43e2-ac56-bbb755c07a02" providerId="ADAL" clId="{4101542E-66A9-4306-BD0F-EFC5C6C97C63}" dt="2026-07-04T03:44:28.441" v="1261" actId="164"/>
+          <ac:chgData name="Akira Terui" userId="3f83de79-c81c-43e2-ac56-bbb755c07a02" providerId="ADAL" clId="{4101542E-66A9-4306-BD0F-EFC5C6C97C63}" dt="2026-07-04T03:56:37.108" v="1264" actId="552"/>
           <ac:spMkLst>
             <pc:docMk/>
             <pc:sldMk cId="1909375894" sldId="256"/>
@@ -155,7 +155,7 @@
           </ac:spMkLst>
         </pc:spChg>
         <pc:spChg chg="mod">
-          <ac:chgData name="Akira Terui" userId="3f83de79-c81c-43e2-ac56-bbb755c07a02" providerId="ADAL" clId="{4101542E-66A9-4306-BD0F-EFC5C6C97C63}" dt="2026-07-04T03:44:28.441" v="1261" actId="164"/>
+          <ac:chgData name="Akira Terui" userId="3f83de79-c81c-43e2-ac56-bbb755c07a02" providerId="ADAL" clId="{4101542E-66A9-4306-BD0F-EFC5C6C97C63}" dt="2026-07-04T03:56:37.108" v="1264" actId="552"/>
           <ac:spMkLst>
             <pc:docMk/>
             <pc:sldMk cId="1909375894" sldId="256"/>
@@ -171,7 +171,7 @@
           </ac:spMkLst>
         </pc:spChg>
         <pc:spChg chg="mod">
-          <ac:chgData name="Akira Terui" userId="3f83de79-c81c-43e2-ac56-bbb755c07a02" providerId="ADAL" clId="{4101542E-66A9-4306-BD0F-EFC5C6C97C63}" dt="2026-07-04T03:44:28.441" v="1261" actId="164"/>
+          <ac:chgData name="Akira Terui" userId="3f83de79-c81c-43e2-ac56-bbb755c07a02" providerId="ADAL" clId="{4101542E-66A9-4306-BD0F-EFC5C6C97C63}" dt="2026-07-04T03:56:37.108" v="1264" actId="552"/>
           <ac:spMkLst>
             <pc:docMk/>
             <pc:sldMk cId="1909375894" sldId="256"/>
@@ -187,7 +187,7 @@
           </ac:spMkLst>
         </pc:spChg>
         <pc:spChg chg="mod">
-          <ac:chgData name="Akira Terui" userId="3f83de79-c81c-43e2-ac56-bbb755c07a02" providerId="ADAL" clId="{4101542E-66A9-4306-BD0F-EFC5C6C97C63}" dt="2026-07-04T03:44:28.441" v="1261" actId="164"/>
+          <ac:chgData name="Akira Terui" userId="3f83de79-c81c-43e2-ac56-bbb755c07a02" providerId="ADAL" clId="{4101542E-66A9-4306-BD0F-EFC5C6C97C63}" dt="2026-07-04T03:56:37.108" v="1264" actId="552"/>
           <ac:spMkLst>
             <pc:docMk/>
             <pc:sldMk cId="1909375894" sldId="256"/>
@@ -627,7 +627,7 @@
           </ac:cxnSpMkLst>
         </pc:cxnChg>
         <pc:cxnChg chg="mod">
-          <ac:chgData name="Akira Terui" userId="3f83de79-c81c-43e2-ac56-bbb755c07a02" providerId="ADAL" clId="{4101542E-66A9-4306-BD0F-EFC5C6C97C63}" dt="2026-07-04T03:39:48.885" v="1189" actId="14100"/>
+          <ac:chgData name="Akira Terui" userId="3f83de79-c81c-43e2-ac56-bbb755c07a02" providerId="ADAL" clId="{4101542E-66A9-4306-BD0F-EFC5C6C97C63}" dt="2026-07-04T03:56:37.108" v="1264" actId="552"/>
           <ac:cxnSpMkLst>
             <pc:docMk/>
             <pc:sldMk cId="1909375894" sldId="256"/>
@@ -4672,8 +4672,8 @@
             </p:sp>
           </mc:Fallback>
         </mc:AlternateContent>
-        <mc:AlternateContent xmlns:mc="http://schemas.openxmlformats.org/markup-compatibility/2006">
-          <mc:Choice xmlns:a14="http://schemas.microsoft.com/office/drawing/2010/main" Requires="a14">
+        <mc:AlternateContent xmlns:mc="http://schemas.openxmlformats.org/markup-compatibility/2006" xmlns:a14="http://schemas.microsoft.com/office/drawing/2010/main">
+          <mc:Choice Requires="a14">
             <p:sp>
               <p:nvSpPr>
                 <p:cNvPr id="73" name="TextBox 72">
@@ -4781,7 +4781,7 @@
               </p:txBody>
             </p:sp>
           </mc:Choice>
-          <mc:Fallback>
+          <mc:Fallback xmlns="">
             <p:sp>
               <p:nvSpPr>
                 <p:cNvPr id="73" name="TextBox 72">
@@ -4842,7 +4842,7 @@
               </p:nvSpPr>
               <p:spPr>
                 <a:xfrm>
-                  <a:off x="538843" y="461645"/>
+                  <a:off x="468087" y="461645"/>
                   <a:ext cx="2076274" cy="663900"/>
                 </a:xfrm>
                 <a:prstGeom prst="rect">
@@ -4932,7 +4932,7 @@
               </p:nvSpPr>
               <p:spPr>
                 <a:xfrm>
-                  <a:off x="538843" y="461645"/>
+                  <a:off x="468087" y="461645"/>
                   <a:ext cx="2076274" cy="663900"/>
                 </a:xfrm>
                 <a:prstGeom prst="rect">
@@ -4941,7 +4941,7 @@
                 <a:blipFill>
                   <a:blip r:embed="rId4"/>
                   <a:stretch>
-                    <a:fillRect l="-2639" t="-3670" b="-14679"/>
+                    <a:fillRect l="-2647" t="-3670" b="-14679"/>
                   </a:stretch>
                 </a:blipFill>
               </p:spPr>
@@ -4960,8 +4960,8 @@
             </p:sp>
           </mc:Fallback>
         </mc:AlternateContent>
-        <mc:AlternateContent xmlns:mc="http://schemas.openxmlformats.org/markup-compatibility/2006">
-          <mc:Choice xmlns:a14="http://schemas.microsoft.com/office/drawing/2010/main" Requires="a14">
+        <mc:AlternateContent xmlns:mc="http://schemas.openxmlformats.org/markup-compatibility/2006" xmlns:a14="http://schemas.microsoft.com/office/drawing/2010/main">
+          <mc:Choice Requires="a14">
             <p:sp>
               <p:nvSpPr>
                 <p:cNvPr id="74" name="TextBox 73">
@@ -5114,7 +5114,7 @@
               </p:txBody>
             </p:sp>
           </mc:Choice>
-          <mc:Fallback>
+          <mc:Fallback xmlns="">
             <p:sp>
               <p:nvSpPr>
                 <p:cNvPr id="74" name="TextBox 73">
@@ -5175,7 +5175,7 @@
               </p:nvSpPr>
               <p:spPr>
                 <a:xfrm>
-                  <a:off x="538844" y="4746300"/>
+                  <a:off x="468087" y="4746300"/>
                   <a:ext cx="2017027" cy="663900"/>
                 </a:xfrm>
                 <a:prstGeom prst="rect">
@@ -5298,7 +5298,7 @@
               </p:nvSpPr>
               <p:spPr>
                 <a:xfrm>
-                  <a:off x="538844" y="4746300"/>
+                  <a:off x="468087" y="4746300"/>
                   <a:ext cx="2017027" cy="663900"/>
                 </a:xfrm>
                 <a:prstGeom prst="rect">
@@ -5326,8 +5326,8 @@
             </p:sp>
           </mc:Fallback>
         </mc:AlternateContent>
-        <mc:AlternateContent xmlns:mc="http://schemas.openxmlformats.org/markup-compatibility/2006">
-          <mc:Choice xmlns:a14="http://schemas.microsoft.com/office/drawing/2010/main" Requires="a14">
+        <mc:AlternateContent xmlns:mc="http://schemas.openxmlformats.org/markup-compatibility/2006" xmlns:a14="http://schemas.microsoft.com/office/drawing/2010/main">
+          <mc:Choice Requires="a14">
             <p:sp>
               <p:nvSpPr>
                 <p:cNvPr id="75" name="TextBox 74">
@@ -5480,7 +5480,7 @@
               </p:txBody>
             </p:sp>
           </mc:Choice>
-          <mc:Fallback>
+          <mc:Fallback xmlns="">
             <p:sp>
               <p:nvSpPr>
                 <p:cNvPr id="75" name="TextBox 74">
@@ -5542,8 +5542,8 @@
           </p:nvCxnSpPr>
           <p:spPr>
             <a:xfrm flipH="1" flipV="1">
-              <a:off x="1611963" y="2252271"/>
-              <a:ext cx="639127" cy="48435"/>
+              <a:off x="1611963" y="2252270"/>
+              <a:ext cx="639127" cy="48436"/>
             </a:xfrm>
             <a:prstGeom prst="line">
               <a:avLst/>
@@ -9592,8 +9592,8 @@
             </a:p>
           </p:txBody>
         </p:sp>
-        <mc:AlternateContent xmlns:mc="http://schemas.openxmlformats.org/markup-compatibility/2006">
-          <mc:Choice xmlns:a14="http://schemas.microsoft.com/office/drawing/2010/main" Requires="a14">
+        <mc:AlternateContent xmlns:mc="http://schemas.openxmlformats.org/markup-compatibility/2006" xmlns:a14="http://schemas.microsoft.com/office/drawing/2010/main">
+          <mc:Choice Requires="a14">
             <p:sp>
               <p:nvSpPr>
                 <p:cNvPr id="237" name="TextBox 236">
@@ -9667,7 +9667,7 @@
               </p:txBody>
             </p:sp>
           </mc:Choice>
-          <mc:Fallback>
+          <mc:Fallback xmlns="">
             <p:sp>
               <p:nvSpPr>
                 <p:cNvPr id="237" name="TextBox 236">
@@ -10371,7 +10371,7 @@
               </p:nvSpPr>
               <p:spPr>
                 <a:xfrm>
-                  <a:off x="531936" y="2780385"/>
+                  <a:off x="468087" y="2780385"/>
                   <a:ext cx="2221634" cy="378117"/>
                 </a:xfrm>
                 <a:prstGeom prst="rect">
@@ -10446,7 +10446,7 @@
               </p:nvSpPr>
               <p:spPr>
                 <a:xfrm>
-                  <a:off x="531936" y="2780385"/>
+                  <a:off x="468087" y="2780385"/>
                   <a:ext cx="2221634" cy="378117"/>
                 </a:xfrm>
                 <a:prstGeom prst="rect">
@@ -10455,7 +10455,7 @@
                 <a:blipFill>
                   <a:blip r:embed="rId9"/>
                   <a:stretch>
-                    <a:fillRect l="-2466" t="-8065" b="-25806"/>
+                    <a:fillRect l="-2473" t="-8065" b="-25806"/>
                   </a:stretch>
                 </a:blipFill>
               </p:spPr>

--- a/tex/figure_scheme.pptx
+++ b/tex/figure_scheme.pptx
@@ -126,7 +126,7 @@
 <file path=ppt/revisionInfo.xml><?xml version="1.0" encoding="utf-8"?>
 <p1510:revInfo xmlns:a="http://schemas.openxmlformats.org/drawingml/2006/main" xmlns:r="http://schemas.openxmlformats.org/officeDocument/2006/relationships" xmlns:p1510="http://schemas.microsoft.com/office/powerpoint/2015/10/main">
   <p1510:revLst>
-    <p1510:client id="{609E8181-B26E-4E63-9B5F-8F9213F9A176}" v="4" dt="2026-07-04T03:44:49.505"/>
+    <p1510:client id="{02B81203-7BF0-4F96-B65C-8AB01D97A066}" v="22" dt="2026-07-21T19:58:56.439"/>
   </p1510:revLst>
 </p1510:revInfo>
 </file>
@@ -226,14 +226,6 @@
             <ac:spMk id="81" creationId="{89F8A15B-836B-7314-53BF-62AA01F97A4D}"/>
           </ac:spMkLst>
         </pc:spChg>
-        <pc:spChg chg="mod">
-          <ac:chgData name="Akira Terui" userId="3f83de79-c81c-43e2-ac56-bbb755c07a02" providerId="ADAL" clId="{4101542E-66A9-4306-BD0F-EFC5C6C97C63}" dt="2026-07-04T03:41:15.796" v="1227" actId="1035"/>
-          <ac:spMkLst>
-            <pc:docMk/>
-            <pc:sldMk cId="1909375894" sldId="256"/>
-            <ac:spMk id="100" creationId="{09F36B01-58AA-076E-1E9B-6370D7B3676C}"/>
-          </ac:spMkLst>
-        </pc:spChg>
         <pc:spChg chg="add mod">
           <ac:chgData name="Akira Terui" userId="3f83de79-c81c-43e2-ac56-bbb755c07a02" providerId="ADAL" clId="{4101542E-66A9-4306-BD0F-EFC5C6C97C63}" dt="2026-07-04T03:44:28.441" v="1261" actId="164"/>
           <ac:spMkLst>
@@ -312,14 +304,6 @@
             <pc:docMk/>
             <pc:sldMk cId="1909375894" sldId="256"/>
             <ac:grpSpMk id="9" creationId="{2BBCBFA6-8BA7-2035-E991-C8E4A7BAE704}"/>
-          </ac:grpSpMkLst>
-        </pc:grpChg>
-        <pc:grpChg chg="mod">
-          <ac:chgData name="Akira Terui" userId="3f83de79-c81c-43e2-ac56-bbb755c07a02" providerId="ADAL" clId="{4101542E-66A9-4306-BD0F-EFC5C6C97C63}" dt="2026-07-04T03:44:32.722" v="1263" actId="12789"/>
-          <ac:grpSpMkLst>
-            <pc:docMk/>
-            <pc:sldMk cId="1909375894" sldId="256"/>
-            <ac:grpSpMk id="14" creationId="{5DC001D1-B74D-AEF5-7CDB-A2C0CF7C7796}"/>
           </ac:grpSpMkLst>
         </pc:grpChg>
         <pc:grpChg chg="add mod topLvl">
@@ -1218,14 +1202,6 @@
             <ac:spMk id="81" creationId="{89F8A15B-836B-7314-53BF-62AA01F97A4D}"/>
           </ac:spMkLst>
         </pc:spChg>
-        <pc:spChg chg="add mod">
-          <ac:chgData name="Akira Terui" userId="3f83de79-c81c-43e2-ac56-bbb755c07a02" providerId="ADAL" clId="{0169A10B-7A1B-4780-8EB1-66779DFD7188}" dt="2026-07-01T14:12:39.577" v="1560" actId="1036"/>
-          <ac:spMkLst>
-            <pc:docMk/>
-            <pc:sldMk cId="1909375894" sldId="256"/>
-            <ac:spMk id="100" creationId="{09F36B01-58AA-076E-1E9B-6370D7B3676C}"/>
-          </ac:spMkLst>
-        </pc:spChg>
         <pc:spChg chg="mod">
           <ac:chgData name="Akira Terui" userId="3f83de79-c81c-43e2-ac56-bbb755c07a02" providerId="ADAL" clId="{0169A10B-7A1B-4780-8EB1-66779DFD7188}" dt="2026-07-01T14:12:39.577" v="1560" actId="1036"/>
           <ac:spMkLst>
@@ -1487,13 +1463,13 @@
   </pc:docChgLst>
   <pc:docChgLst>
     <pc:chgData name="Akira Terui" userId="3f83de79-c81c-43e2-ac56-bbb755c07a02" providerId="ADAL" clId="{02B81203-7BF0-4F96-B65C-8AB01D97A066}"/>
-    <pc:docChg chg="undo custSel modSld">
-      <pc:chgData name="Akira Terui" userId="3f83de79-c81c-43e2-ac56-bbb755c07a02" providerId="ADAL" clId="{02B81203-7BF0-4F96-B65C-8AB01D97A066}" dt="2026-07-01T19:13:57.001" v="65" actId="208"/>
+    <pc:docChg chg="undo custSel addSld delSld modSld">
+      <pc:chgData name="Akira Terui" userId="3f83de79-c81c-43e2-ac56-bbb755c07a02" providerId="ADAL" clId="{02B81203-7BF0-4F96-B65C-8AB01D97A066}" dt="2026-07-21T19:59:28.112" v="561" actId="47"/>
       <pc:docMkLst>
         <pc:docMk/>
       </pc:docMkLst>
-      <pc:sldChg chg="addSp modSp mod">
-        <pc:chgData name="Akira Terui" userId="3f83de79-c81c-43e2-ac56-bbb755c07a02" providerId="ADAL" clId="{02B81203-7BF0-4F96-B65C-8AB01D97A066}" dt="2026-07-01T19:13:57.001" v="65" actId="208"/>
+      <pc:sldChg chg="addSp delSp modSp mod">
+        <pc:chgData name="Akira Terui" userId="3f83de79-c81c-43e2-ac56-bbb755c07a02" providerId="ADAL" clId="{02B81203-7BF0-4F96-B65C-8AB01D97A066}" dt="2026-07-21T19:58:56.439" v="560"/>
         <pc:sldMkLst>
           <pc:docMk/>
           <pc:sldMk cId="1909375894" sldId="256"/>
@@ -1506,12 +1482,28 @@
             <ac:spMk id="7" creationId="{B1F3E2F2-C812-A441-4971-99C8963825B9}"/>
           </ac:spMkLst>
         </pc:spChg>
+        <pc:spChg chg="add mod">
+          <ac:chgData name="Akira Terui" userId="3f83de79-c81c-43e2-ac56-bbb755c07a02" providerId="ADAL" clId="{02B81203-7BF0-4F96-B65C-8AB01D97A066}" dt="2026-07-21T19:58:56.439" v="560"/>
+          <ac:spMkLst>
+            <pc:docMk/>
+            <pc:sldMk cId="1909375894" sldId="256"/>
+            <ac:spMk id="13" creationId="{27B9A9B9-B31E-3B76-CC1A-0B2743660B36}"/>
+          </ac:spMkLst>
+        </pc:spChg>
         <pc:spChg chg="mod">
           <ac:chgData name="Akira Terui" userId="3f83de79-c81c-43e2-ac56-bbb755c07a02" providerId="ADAL" clId="{02B81203-7BF0-4F96-B65C-8AB01D97A066}" dt="2026-07-01T14:32:07.851" v="56" actId="2711"/>
           <ac:spMkLst>
             <pc:docMk/>
             <pc:sldMk cId="1909375894" sldId="256"/>
             <ac:spMk id="29" creationId="{DC21287D-5699-8380-67A9-EA9E39AC2522}"/>
+          </ac:spMkLst>
+        </pc:spChg>
+        <pc:spChg chg="mod">
+          <ac:chgData name="Akira Terui" userId="3f83de79-c81c-43e2-ac56-bbb755c07a02" providerId="ADAL" clId="{02B81203-7BF0-4F96-B65C-8AB01D97A066}" dt="2026-07-21T19:34:03.174" v="89" actId="165"/>
+          <ac:spMkLst>
+            <pc:docMk/>
+            <pc:sldMk cId="1909375894" sldId="256"/>
+            <ac:spMk id="50" creationId="{DA173AE1-8839-9306-5241-AFAEBCACDBF6}"/>
           </ac:spMkLst>
         </pc:spChg>
         <pc:spChg chg="mod">
@@ -1530,16 +1522,16 @@
             <ac:spMk id="63" creationId="{C49A7F1B-05C3-1118-C78E-D059521099DB}"/>
           </ac:spMkLst>
         </pc:spChg>
-        <pc:spChg chg="mod">
-          <ac:chgData name="Akira Terui" userId="3f83de79-c81c-43e2-ac56-bbb755c07a02" providerId="ADAL" clId="{02B81203-7BF0-4F96-B65C-8AB01D97A066}" dt="2026-07-01T14:29:45.093" v="5" actId="255"/>
+        <pc:spChg chg="mod topLvl">
+          <ac:chgData name="Akira Terui" userId="3f83de79-c81c-43e2-ac56-bbb755c07a02" providerId="ADAL" clId="{02B81203-7BF0-4F96-B65C-8AB01D97A066}" dt="2026-07-21T19:34:03.174" v="89" actId="165"/>
           <ac:spMkLst>
             <pc:docMk/>
             <pc:sldMk cId="1909375894" sldId="256"/>
             <ac:spMk id="73" creationId="{49879CCA-4DA6-2961-013E-D7379B5FEA1A}"/>
           </ac:spMkLst>
         </pc:spChg>
-        <pc:spChg chg="mod">
-          <ac:chgData name="Akira Terui" userId="3f83de79-c81c-43e2-ac56-bbb755c07a02" providerId="ADAL" clId="{02B81203-7BF0-4F96-B65C-8AB01D97A066}" dt="2026-07-01T14:31:41.879" v="46" actId="552"/>
+        <pc:spChg chg="mod topLvl">
+          <ac:chgData name="Akira Terui" userId="3f83de79-c81c-43e2-ac56-bbb755c07a02" providerId="ADAL" clId="{02B81203-7BF0-4F96-B65C-8AB01D97A066}" dt="2026-07-21T19:34:03.174" v="89" actId="165"/>
           <ac:spMkLst>
             <pc:docMk/>
             <pc:sldMk cId="1909375894" sldId="256"/>
@@ -1555,7 +1547,15 @@
           </ac:spMkLst>
         </pc:spChg>
         <pc:spChg chg="mod">
-          <ac:chgData name="Akira Terui" userId="3f83de79-c81c-43e2-ac56-bbb755c07a02" providerId="ADAL" clId="{02B81203-7BF0-4F96-B65C-8AB01D97A066}" dt="2026-07-01T14:32:07.851" v="56" actId="2711"/>
+          <ac:chgData name="Akira Terui" userId="3f83de79-c81c-43e2-ac56-bbb755c07a02" providerId="ADAL" clId="{02B81203-7BF0-4F96-B65C-8AB01D97A066}" dt="2026-07-21T19:34:03.174" v="89" actId="165"/>
+          <ac:spMkLst>
+            <pc:docMk/>
+            <pc:sldMk cId="1909375894" sldId="256"/>
+            <ac:spMk id="81" creationId="{89F8A15B-836B-7314-53BF-62AA01F97A4D}"/>
+          </ac:spMkLst>
+        </pc:spChg>
+        <pc:spChg chg="del mod">
+          <ac:chgData name="Akira Terui" userId="3f83de79-c81c-43e2-ac56-bbb755c07a02" providerId="ADAL" clId="{02B81203-7BF0-4F96-B65C-8AB01D97A066}" dt="2026-07-21T19:58:56.026" v="559" actId="478"/>
           <ac:spMkLst>
             <pc:docMk/>
             <pc:sldMk cId="1909375894" sldId="256"/>
@@ -1563,31 +1563,63 @@
           </ac:spMkLst>
         </pc:spChg>
         <pc:spChg chg="mod">
-          <ac:chgData name="Akira Terui" userId="3f83de79-c81c-43e2-ac56-bbb755c07a02" providerId="ADAL" clId="{02B81203-7BF0-4F96-B65C-8AB01D97A066}" dt="2026-07-01T14:31:02.958" v="39" actId="552"/>
+          <ac:chgData name="Akira Terui" userId="3f83de79-c81c-43e2-ac56-bbb755c07a02" providerId="ADAL" clId="{02B81203-7BF0-4F96-B65C-8AB01D97A066}" dt="2026-07-21T19:34:02.656" v="88" actId="165"/>
+          <ac:spMkLst>
+            <pc:docMk/>
+            <pc:sldMk cId="1909375894" sldId="256"/>
+            <ac:spMk id="117" creationId="{588FCE71-622F-3F6F-C25A-9965A192FEFE}"/>
+          </ac:spMkLst>
+        </pc:spChg>
+        <pc:spChg chg="mod">
+          <ac:chgData name="Akira Terui" userId="3f83de79-c81c-43e2-ac56-bbb755c07a02" providerId="ADAL" clId="{02B81203-7BF0-4F96-B65C-8AB01D97A066}" dt="2026-07-21T19:34:03.174" v="89" actId="165"/>
+          <ac:spMkLst>
+            <pc:docMk/>
+            <pc:sldMk cId="1909375894" sldId="256"/>
+            <ac:spMk id="170" creationId="{12D78E07-180A-0BDE-35B5-F1FF61015184}"/>
+          </ac:spMkLst>
+        </pc:spChg>
+        <pc:spChg chg="mod">
+          <ac:chgData name="Akira Terui" userId="3f83de79-c81c-43e2-ac56-bbb755c07a02" providerId="ADAL" clId="{02B81203-7BF0-4F96-B65C-8AB01D97A066}" dt="2026-07-21T19:34:03.174" v="89" actId="165"/>
+          <ac:spMkLst>
+            <pc:docMk/>
+            <pc:sldMk cId="1909375894" sldId="256"/>
+            <ac:spMk id="221" creationId="{F19D1104-4BCB-4648-EEA1-0103A908BA2E}"/>
+          </ac:spMkLst>
+        </pc:spChg>
+        <pc:spChg chg="mod topLvl">
+          <ac:chgData name="Akira Terui" userId="3f83de79-c81c-43e2-ac56-bbb755c07a02" providerId="ADAL" clId="{02B81203-7BF0-4F96-B65C-8AB01D97A066}" dt="2026-07-21T19:34:03.174" v="89" actId="165"/>
           <ac:spMkLst>
             <pc:docMk/>
             <pc:sldMk cId="1909375894" sldId="256"/>
             <ac:spMk id="225" creationId="{6A0DD742-92F8-5E9B-318C-3E34F6DCB5F6}"/>
           </ac:spMkLst>
         </pc:spChg>
-        <pc:spChg chg="mod">
-          <ac:chgData name="Akira Terui" userId="3f83de79-c81c-43e2-ac56-bbb755c07a02" providerId="ADAL" clId="{02B81203-7BF0-4F96-B65C-8AB01D97A066}" dt="2026-07-01T14:31:02.958" v="39" actId="552"/>
+        <pc:spChg chg="mod topLvl">
+          <ac:chgData name="Akira Terui" userId="3f83de79-c81c-43e2-ac56-bbb755c07a02" providerId="ADAL" clId="{02B81203-7BF0-4F96-B65C-8AB01D97A066}" dt="2026-07-21T19:34:03.174" v="89" actId="165"/>
           <ac:spMkLst>
             <pc:docMk/>
             <pc:sldMk cId="1909375894" sldId="256"/>
             <ac:spMk id="226" creationId="{8B296F1E-38C7-CFB6-D71D-A78118F9FECC}"/>
           </ac:spMkLst>
         </pc:spChg>
-        <pc:spChg chg="mod">
-          <ac:chgData name="Akira Terui" userId="3f83de79-c81c-43e2-ac56-bbb755c07a02" providerId="ADAL" clId="{02B81203-7BF0-4F96-B65C-8AB01D97A066}" dt="2026-07-01T14:32:07.851" v="56" actId="2711"/>
+        <pc:spChg chg="mod topLvl">
+          <ac:chgData name="Akira Terui" userId="3f83de79-c81c-43e2-ac56-bbb755c07a02" providerId="ADAL" clId="{02B81203-7BF0-4F96-B65C-8AB01D97A066}" dt="2026-07-21T19:34:03.174" v="89" actId="165"/>
+          <ac:spMkLst>
+            <pc:docMk/>
+            <pc:sldMk cId="1909375894" sldId="256"/>
+            <ac:spMk id="234" creationId="{B18935E2-2D68-76A1-E026-161A2391F2FF}"/>
+          </ac:spMkLst>
+        </pc:spChg>
+        <pc:spChg chg="mod topLvl">
+          <ac:chgData name="Akira Terui" userId="3f83de79-c81c-43e2-ac56-bbb755c07a02" providerId="ADAL" clId="{02B81203-7BF0-4F96-B65C-8AB01D97A066}" dt="2026-07-21T19:34:03.174" v="89" actId="165"/>
           <ac:spMkLst>
             <pc:docMk/>
             <pc:sldMk cId="1909375894" sldId="256"/>
             <ac:spMk id="237" creationId="{2802DC72-4FEC-D9EC-F0C8-16E725442D84}"/>
           </ac:spMkLst>
         </pc:spChg>
-        <pc:grpChg chg="add mod">
-          <ac:chgData name="Akira Terui" userId="3f83de79-c81c-43e2-ac56-bbb755c07a02" providerId="ADAL" clId="{02B81203-7BF0-4F96-B65C-8AB01D97A066}" dt="2026-07-01T14:31:22.278" v="44" actId="12788"/>
+        <pc:grpChg chg="add del mod">
+          <ac:chgData name="Akira Terui" userId="3f83de79-c81c-43e2-ac56-bbb755c07a02" providerId="ADAL" clId="{02B81203-7BF0-4F96-B65C-8AB01D97A066}" dt="2026-07-21T19:34:02.656" v="88" actId="165"/>
           <ac:grpSpMkLst>
             <pc:docMk/>
             <pc:sldMk cId="1909375894" sldId="256"/>
@@ -1610,24 +1642,96 @@
             <ac:grpSpMk id="88" creationId="{1BE98CD2-07EF-6230-AD0E-4407E64B4219}"/>
           </ac:grpSpMkLst>
         </pc:grpChg>
+        <pc:grpChg chg="mod topLvl">
+          <ac:chgData name="Akira Terui" userId="3f83de79-c81c-43e2-ac56-bbb755c07a02" providerId="ADAL" clId="{02B81203-7BF0-4F96-B65C-8AB01D97A066}" dt="2026-07-21T19:34:02.656" v="88" actId="165"/>
+          <ac:grpSpMkLst>
+            <pc:docMk/>
+            <pc:sldMk cId="1909375894" sldId="256"/>
+            <ac:grpSpMk id="140" creationId="{5E0903A6-C5D4-716D-DD7C-23E94F39EAB8}"/>
+          </ac:grpSpMkLst>
+        </pc:grpChg>
         <pc:grpChg chg="mod">
-          <ac:chgData name="Akira Terui" userId="3f83de79-c81c-43e2-ac56-bbb755c07a02" providerId="ADAL" clId="{02B81203-7BF0-4F96-B65C-8AB01D97A066}" dt="2026-07-01T14:30:17.850" v="14" actId="164"/>
+          <ac:chgData name="Akira Terui" userId="3f83de79-c81c-43e2-ac56-bbb755c07a02" providerId="ADAL" clId="{02B81203-7BF0-4F96-B65C-8AB01D97A066}" dt="2026-07-21T19:34:01.495" v="87" actId="165"/>
+          <ac:grpSpMkLst>
+            <pc:docMk/>
+            <pc:sldMk cId="1909375894" sldId="256"/>
+            <ac:grpSpMk id="141" creationId="{46E29F9C-FB19-88A9-5029-BB65FC03429F}"/>
+          </ac:grpSpMkLst>
+        </pc:grpChg>
+        <pc:grpChg chg="del mod topLvl">
+          <ac:chgData name="Akira Terui" userId="3f83de79-c81c-43e2-ac56-bbb755c07a02" providerId="ADAL" clId="{02B81203-7BF0-4F96-B65C-8AB01D97A066}" dt="2026-07-21T19:34:02.656" v="88" actId="165"/>
           <ac:grpSpMkLst>
             <pc:docMk/>
             <pc:sldMk cId="1909375894" sldId="256"/>
             <ac:grpSpMk id="145" creationId="{C58A03FD-0B11-05C3-025C-221316D8FB0D}"/>
           </ac:grpSpMkLst>
         </pc:grpChg>
+        <pc:grpChg chg="mod topLvl">
+          <ac:chgData name="Akira Terui" userId="3f83de79-c81c-43e2-ac56-bbb755c07a02" providerId="ADAL" clId="{02B81203-7BF0-4F96-B65C-8AB01D97A066}" dt="2026-07-21T19:34:02.656" v="88" actId="165"/>
+          <ac:grpSpMkLst>
+            <pc:docMk/>
+            <pc:sldMk cId="1909375894" sldId="256"/>
+            <ac:grpSpMk id="150" creationId="{BC008A0F-C5C2-96E8-DF65-E7BF56E1502E}"/>
+          </ac:grpSpMkLst>
+        </pc:grpChg>
+        <pc:grpChg chg="mod topLvl">
+          <ac:chgData name="Akira Terui" userId="3f83de79-c81c-43e2-ac56-bbb755c07a02" providerId="ADAL" clId="{02B81203-7BF0-4F96-B65C-8AB01D97A066}" dt="2026-07-21T19:34:02.656" v="88" actId="165"/>
+          <ac:grpSpMkLst>
+            <pc:docMk/>
+            <pc:sldMk cId="1909375894" sldId="256"/>
+            <ac:grpSpMk id="151" creationId="{6298C513-7361-2D22-1C63-5E6BD4449187}"/>
+          </ac:grpSpMkLst>
+        </pc:grpChg>
         <pc:grpChg chg="mod">
-          <ac:chgData name="Akira Terui" userId="3f83de79-c81c-43e2-ac56-bbb755c07a02" providerId="ADAL" clId="{02B81203-7BF0-4F96-B65C-8AB01D97A066}" dt="2026-07-01T14:30:17.850" v="14" actId="164"/>
+          <ac:chgData name="Akira Terui" userId="3f83de79-c81c-43e2-ac56-bbb755c07a02" providerId="ADAL" clId="{02B81203-7BF0-4F96-B65C-8AB01D97A066}" dt="2026-07-21T19:34:01.495" v="87" actId="165"/>
+          <ac:grpSpMkLst>
+            <pc:docMk/>
+            <pc:sldMk cId="1909375894" sldId="256"/>
+            <ac:grpSpMk id="152" creationId="{459A0C76-4AB0-C134-3834-6214D6607CA1}"/>
+          </ac:grpSpMkLst>
+        </pc:grpChg>
+        <pc:grpChg chg="mod topLvl">
+          <ac:chgData name="Akira Terui" userId="3f83de79-c81c-43e2-ac56-bbb755c07a02" providerId="ADAL" clId="{02B81203-7BF0-4F96-B65C-8AB01D97A066}" dt="2026-07-21T19:34:02.656" v="88" actId="165"/>
+          <ac:grpSpMkLst>
+            <pc:docMk/>
+            <pc:sldMk cId="1909375894" sldId="256"/>
+            <ac:grpSpMk id="155" creationId="{DBCC3596-5710-8A7C-21DC-0B8B78C2D5D4}"/>
+          </ac:grpSpMkLst>
+        </pc:grpChg>
+        <pc:grpChg chg="add mod">
+          <ac:chgData name="Akira Terui" userId="3f83de79-c81c-43e2-ac56-bbb755c07a02" providerId="ADAL" clId="{02B81203-7BF0-4F96-B65C-8AB01D97A066}" dt="2026-07-21T19:34:01.495" v="87" actId="165"/>
           <ac:grpSpMkLst>
             <pc:docMk/>
             <pc:sldMk cId="1909375894" sldId="256"/>
             <ac:grpSpMk id="196" creationId="{0C5C5671-40B4-B784-1860-15A1B5F65063}"/>
           </ac:grpSpMkLst>
         </pc:grpChg>
-        <pc:grpChg chg="mod">
-          <ac:chgData name="Akira Terui" userId="3f83de79-c81c-43e2-ac56-bbb755c07a02" providerId="ADAL" clId="{02B81203-7BF0-4F96-B65C-8AB01D97A066}" dt="2026-07-01T14:30:17.850" v="14" actId="164"/>
+        <pc:grpChg chg="mod topLvl">
+          <ac:chgData name="Akira Terui" userId="3f83de79-c81c-43e2-ac56-bbb755c07a02" providerId="ADAL" clId="{02B81203-7BF0-4F96-B65C-8AB01D97A066}" dt="2026-07-21T19:34:02.656" v="88" actId="165"/>
+          <ac:grpSpMkLst>
+            <pc:docMk/>
+            <pc:sldMk cId="1909375894" sldId="256"/>
+            <ac:grpSpMk id="198" creationId="{B3172196-C914-7F10-9DC0-F0AA95B74AB9}"/>
+          </ac:grpSpMkLst>
+        </pc:grpChg>
+        <pc:grpChg chg="mod topLvl">
+          <ac:chgData name="Akira Terui" userId="3f83de79-c81c-43e2-ac56-bbb755c07a02" providerId="ADAL" clId="{02B81203-7BF0-4F96-B65C-8AB01D97A066}" dt="2026-07-21T19:34:01.495" v="87" actId="165"/>
+          <ac:grpSpMkLst>
+            <pc:docMk/>
+            <pc:sldMk cId="1909375894" sldId="256"/>
+            <ac:grpSpMk id="201" creationId="{CEB698C7-622B-A2B9-2CCA-DAAB9AD6AFFC}"/>
+          </ac:grpSpMkLst>
+        </pc:grpChg>
+        <pc:grpChg chg="add del mod">
+          <ac:chgData name="Akira Terui" userId="3f83de79-c81c-43e2-ac56-bbb755c07a02" providerId="ADAL" clId="{02B81203-7BF0-4F96-B65C-8AB01D97A066}" dt="2026-07-21T19:34:00.141" v="84" actId="165"/>
+          <ac:grpSpMkLst>
+            <pc:docMk/>
+            <pc:sldMk cId="1909375894" sldId="256"/>
+            <ac:grpSpMk id="206" creationId="{C4FF9A52-3AEB-B643-3B94-17801134BDFD}"/>
+          </ac:grpSpMkLst>
+        </pc:grpChg>
+        <pc:grpChg chg="add mod">
+          <ac:chgData name="Akira Terui" userId="3f83de79-c81c-43e2-ac56-bbb755c07a02" providerId="ADAL" clId="{02B81203-7BF0-4F96-B65C-8AB01D97A066}" dt="2026-07-21T19:34:01.495" v="87" actId="165"/>
           <ac:grpSpMkLst>
             <pc:docMk/>
             <pc:sldMk cId="1909375894" sldId="256"/>
@@ -1658,12 +1762,483 @@
             <ac:cxnSpMk id="99" creationId="{D9B1EF40-00C5-1819-BCA5-EFD36F949E06}"/>
           </ac:cxnSpMkLst>
         </pc:cxnChg>
+        <pc:cxnChg chg="mod topLvl">
+          <ac:chgData name="Akira Terui" userId="3f83de79-c81c-43e2-ac56-bbb755c07a02" providerId="ADAL" clId="{02B81203-7BF0-4F96-B65C-8AB01D97A066}" dt="2026-07-21T19:34:00.141" v="84" actId="165"/>
+          <ac:cxnSpMkLst>
+            <pc:docMk/>
+            <pc:sldMk cId="1909375894" sldId="256"/>
+            <ac:cxnSpMk id="207" creationId="{BDC7C6BD-F27F-236F-B452-D6514C8DAFB3}"/>
+          </ac:cxnSpMkLst>
+        </pc:cxnChg>
+        <pc:cxnChg chg="mod topLvl">
+          <ac:chgData name="Akira Terui" userId="3f83de79-c81c-43e2-ac56-bbb755c07a02" providerId="ADAL" clId="{02B81203-7BF0-4F96-B65C-8AB01D97A066}" dt="2026-07-21T19:34:01.031" v="86" actId="1076"/>
+          <ac:cxnSpMkLst>
+            <pc:docMk/>
+            <pc:sldMk cId="1909375894" sldId="256"/>
+            <ac:cxnSpMk id="208" creationId="{18FA970B-5E81-7859-48AE-AB3E62D67009}"/>
+          </ac:cxnSpMkLst>
+        </pc:cxnChg>
         <pc:cxnChg chg="mod">
           <ac:chgData name="Akira Terui" userId="3f83de79-c81c-43e2-ac56-bbb755c07a02" providerId="ADAL" clId="{02B81203-7BF0-4F96-B65C-8AB01D97A066}" dt="2026-07-01T19:13:57.001" v="65" actId="208"/>
           <ac:cxnSpMkLst>
             <pc:docMk/>
             <pc:sldMk cId="1909375894" sldId="256"/>
             <ac:cxnSpMk id="220" creationId="{9FF1A1A1-5ECF-517D-958A-C21AC141A108}"/>
+          </ac:cxnSpMkLst>
+        </pc:cxnChg>
+      </pc:sldChg>
+      <pc:sldChg chg="addSp delSp modSp add del mod">
+        <pc:chgData name="Akira Terui" userId="3f83de79-c81c-43e2-ac56-bbb755c07a02" providerId="ADAL" clId="{02B81203-7BF0-4F96-B65C-8AB01D97A066}" dt="2026-07-21T19:59:28.112" v="561" actId="47"/>
+        <pc:sldMkLst>
+          <pc:docMk/>
+          <pc:sldMk cId="1968028105" sldId="257"/>
+        </pc:sldMkLst>
+        <pc:spChg chg="mod">
+          <ac:chgData name="Akira Terui" userId="3f83de79-c81c-43e2-ac56-bbb755c07a02" providerId="ADAL" clId="{02B81203-7BF0-4F96-B65C-8AB01D97A066}" dt="2026-07-21T19:34:18.624" v="92" actId="165"/>
+          <ac:spMkLst>
+            <pc:docMk/>
+            <pc:sldMk cId="1968028105" sldId="257"/>
+            <ac:spMk id="17" creationId="{F2002C0C-3C88-7724-36A8-4C4AA134645D}"/>
+          </ac:spMkLst>
+        </pc:spChg>
+        <pc:spChg chg="mod">
+          <ac:chgData name="Akira Terui" userId="3f83de79-c81c-43e2-ac56-bbb755c07a02" providerId="ADAL" clId="{02B81203-7BF0-4F96-B65C-8AB01D97A066}" dt="2026-07-21T19:45:49.352" v="390" actId="165"/>
+          <ac:spMkLst>
+            <pc:docMk/>
+            <pc:sldMk cId="1968028105" sldId="257"/>
+            <ac:spMk id="62" creationId="{FF449ED3-ABCA-6890-E15B-4C796DE0459A}"/>
+          </ac:spMkLst>
+        </pc:spChg>
+        <pc:spChg chg="mod topLvl">
+          <ac:chgData name="Akira Terui" userId="3f83de79-c81c-43e2-ac56-bbb755c07a02" providerId="ADAL" clId="{02B81203-7BF0-4F96-B65C-8AB01D97A066}" dt="2026-07-21T19:34:18.624" v="92" actId="165"/>
+          <ac:spMkLst>
+            <pc:docMk/>
+            <pc:sldMk cId="1968028105" sldId="257"/>
+            <ac:spMk id="63" creationId="{84C4FFBA-1A00-300A-A36A-2040D354F305}"/>
+          </ac:spMkLst>
+        </pc:spChg>
+        <pc:spChg chg="mod topLvl">
+          <ac:chgData name="Akira Terui" userId="3f83de79-c81c-43e2-ac56-bbb755c07a02" providerId="ADAL" clId="{02B81203-7BF0-4F96-B65C-8AB01D97A066}" dt="2026-07-21T19:34:18.624" v="92" actId="165"/>
+          <ac:spMkLst>
+            <pc:docMk/>
+            <pc:sldMk cId="1968028105" sldId="257"/>
+            <ac:spMk id="74" creationId="{7AE1A614-A41D-F3B9-5CE6-A60791F66361}"/>
+          </ac:spMkLst>
+        </pc:spChg>
+        <pc:spChg chg="mod topLvl">
+          <ac:chgData name="Akira Terui" userId="3f83de79-c81c-43e2-ac56-bbb755c07a02" providerId="ADAL" clId="{02B81203-7BF0-4F96-B65C-8AB01D97A066}" dt="2026-07-21T19:34:18.624" v="92" actId="165"/>
+          <ac:spMkLst>
+            <pc:docMk/>
+            <pc:sldMk cId="1968028105" sldId="257"/>
+            <ac:spMk id="75" creationId="{FA38DF04-C33F-B4FF-1BDF-527AA2900D31}"/>
+          </ac:spMkLst>
+        </pc:spChg>
+        <pc:spChg chg="mod">
+          <ac:chgData name="Akira Terui" userId="3f83de79-c81c-43e2-ac56-bbb755c07a02" providerId="ADAL" clId="{02B81203-7BF0-4F96-B65C-8AB01D97A066}" dt="2026-07-21T19:45:54.255" v="391" actId="165"/>
+          <ac:spMkLst>
+            <pc:docMk/>
+            <pc:sldMk cId="1968028105" sldId="257"/>
+            <ac:spMk id="81" creationId="{371B84E8-CAEE-B625-4528-83FB26C54A81}"/>
+          </ac:spMkLst>
+        </pc:spChg>
+        <pc:spChg chg="mod topLvl">
+          <ac:chgData name="Akira Terui" userId="3f83de79-c81c-43e2-ac56-bbb755c07a02" providerId="ADAL" clId="{02B81203-7BF0-4F96-B65C-8AB01D97A066}" dt="2026-07-21T19:40:17.646" v="286" actId="20577"/>
+          <ac:spMkLst>
+            <pc:docMk/>
+            <pc:sldMk cId="1968028105" sldId="257"/>
+            <ac:spMk id="100" creationId="{F986EA3F-6513-42DB-B242-39AE5DDC4DDF}"/>
+          </ac:spMkLst>
+        </pc:spChg>
+        <pc:spChg chg="mod topLvl">
+          <ac:chgData name="Akira Terui" userId="3f83de79-c81c-43e2-ac56-bbb755c07a02" providerId="ADAL" clId="{02B81203-7BF0-4F96-B65C-8AB01D97A066}" dt="2026-07-21T19:40:33.456" v="288" actId="165"/>
+          <ac:spMkLst>
+            <pc:docMk/>
+            <pc:sldMk cId="1968028105" sldId="257"/>
+            <ac:spMk id="117" creationId="{1EDF79B7-CDC1-8244-B6A7-CAF08CE43826}"/>
+          </ac:spMkLst>
+        </pc:spChg>
+        <pc:spChg chg="mod">
+          <ac:chgData name="Akira Terui" userId="3f83de79-c81c-43e2-ac56-bbb755c07a02" providerId="ADAL" clId="{02B81203-7BF0-4F96-B65C-8AB01D97A066}" dt="2026-07-21T19:34:22.540" v="93" actId="165"/>
+          <ac:spMkLst>
+            <pc:docMk/>
+            <pc:sldMk cId="1968028105" sldId="257"/>
+            <ac:spMk id="170" creationId="{C6B3AF5C-2EDC-F3F6-FBD0-969F72C33104}"/>
+          </ac:spMkLst>
+        </pc:spChg>
+        <pc:spChg chg="mod">
+          <ac:chgData name="Akira Terui" userId="3f83de79-c81c-43e2-ac56-bbb755c07a02" providerId="ADAL" clId="{02B81203-7BF0-4F96-B65C-8AB01D97A066}" dt="2026-07-21T19:34:25.247" v="94" actId="165"/>
+          <ac:spMkLst>
+            <pc:docMk/>
+            <pc:sldMk cId="1968028105" sldId="257"/>
+            <ac:spMk id="221" creationId="{CF0215E5-EEA3-4EA2-CBE5-690B8CDCBD90}"/>
+          </ac:spMkLst>
+        </pc:spChg>
+        <pc:spChg chg="mod topLvl">
+          <ac:chgData name="Akira Terui" userId="3f83de79-c81c-43e2-ac56-bbb755c07a02" providerId="ADAL" clId="{02B81203-7BF0-4F96-B65C-8AB01D97A066}" dt="2026-07-21T19:34:18.624" v="92" actId="165"/>
+          <ac:spMkLst>
+            <pc:docMk/>
+            <pc:sldMk cId="1968028105" sldId="257"/>
+            <ac:spMk id="226" creationId="{1FD6DE60-0AA0-F41A-2763-F10025D941B0}"/>
+          </ac:spMkLst>
+        </pc:spChg>
+        <pc:spChg chg="mod topLvl">
+          <ac:chgData name="Akira Terui" userId="3f83de79-c81c-43e2-ac56-bbb755c07a02" providerId="ADAL" clId="{02B81203-7BF0-4F96-B65C-8AB01D97A066}" dt="2026-07-21T19:34:18.624" v="92" actId="165"/>
+          <ac:spMkLst>
+            <pc:docMk/>
+            <pc:sldMk cId="1968028105" sldId="257"/>
+            <ac:spMk id="234" creationId="{5BCEBE77-1415-3A0C-9FB7-3F0D14BC4D38}"/>
+          </ac:spMkLst>
+        </pc:spChg>
+        <pc:grpChg chg="del">
+          <ac:chgData name="Akira Terui" userId="3f83de79-c81c-43e2-ac56-bbb755c07a02" providerId="ADAL" clId="{02B81203-7BF0-4F96-B65C-8AB01D97A066}" dt="2026-07-21T19:45:49.352" v="390" actId="165"/>
+          <ac:grpSpMkLst>
+            <pc:docMk/>
+            <pc:sldMk cId="1968028105" sldId="257"/>
+            <ac:grpSpMk id="9" creationId="{C7739925-6768-2BDC-972D-C551D9CC5B1E}"/>
+          </ac:grpSpMkLst>
+        </pc:grpChg>
+        <pc:grpChg chg="mod">
+          <ac:chgData name="Akira Terui" userId="3f83de79-c81c-43e2-ac56-bbb755c07a02" providerId="ADAL" clId="{02B81203-7BF0-4F96-B65C-8AB01D97A066}" dt="2026-07-21T19:45:49.352" v="390" actId="165"/>
+          <ac:grpSpMkLst>
+            <pc:docMk/>
+            <pc:sldMk cId="1968028105" sldId="257"/>
+            <ac:grpSpMk id="76" creationId="{F891078B-42A4-9EA9-94DB-2B9B0467A2D8}"/>
+          </ac:grpSpMkLst>
+        </pc:grpChg>
+        <pc:grpChg chg="mod topLvl">
+          <ac:chgData name="Akira Terui" userId="3f83de79-c81c-43e2-ac56-bbb755c07a02" providerId="ADAL" clId="{02B81203-7BF0-4F96-B65C-8AB01D97A066}" dt="2026-07-21T19:45:54.255" v="391" actId="165"/>
+          <ac:grpSpMkLst>
+            <pc:docMk/>
+            <pc:sldMk cId="1968028105" sldId="257"/>
+            <ac:grpSpMk id="78" creationId="{FE91134C-B9A1-7648-8FA5-15F0F1BFB20A}"/>
+          </ac:grpSpMkLst>
+        </pc:grpChg>
+        <pc:grpChg chg="del mod topLvl">
+          <ac:chgData name="Akira Terui" userId="3f83de79-c81c-43e2-ac56-bbb755c07a02" providerId="ADAL" clId="{02B81203-7BF0-4F96-B65C-8AB01D97A066}" dt="2026-07-21T19:45:58.638" v="392" actId="165"/>
+          <ac:grpSpMkLst>
+            <pc:docMk/>
+            <pc:sldMk cId="1968028105" sldId="257"/>
+            <ac:grpSpMk id="87" creationId="{EB74A55B-F847-6BC5-86C5-FF38F33DB56B}"/>
+          </ac:grpSpMkLst>
+        </pc:grpChg>
+        <pc:grpChg chg="del mod topLvl">
+          <ac:chgData name="Akira Terui" userId="3f83de79-c81c-43e2-ac56-bbb755c07a02" providerId="ADAL" clId="{02B81203-7BF0-4F96-B65C-8AB01D97A066}" dt="2026-07-21T19:45:54.255" v="391" actId="165"/>
+          <ac:grpSpMkLst>
+            <pc:docMk/>
+            <pc:sldMk cId="1968028105" sldId="257"/>
+            <ac:grpSpMk id="88" creationId="{A301A83D-B138-94C7-F39C-4B8EFDF309C2}"/>
+          </ac:grpSpMkLst>
+        </pc:grpChg>
+        <pc:grpChg chg="mod">
+          <ac:chgData name="Akira Terui" userId="3f83de79-c81c-43e2-ac56-bbb755c07a02" providerId="ADAL" clId="{02B81203-7BF0-4F96-B65C-8AB01D97A066}" dt="2026-07-21T19:45:49.352" v="390" actId="165"/>
+          <ac:grpSpMkLst>
+            <pc:docMk/>
+            <pc:sldMk cId="1968028105" sldId="257"/>
+            <ac:grpSpMk id="89" creationId="{248CA944-48C2-649B-82B7-6B980EEBA93C}"/>
+          </ac:grpSpMkLst>
+        </pc:grpChg>
+        <pc:grpChg chg="mod">
+          <ac:chgData name="Akira Terui" userId="3f83de79-c81c-43e2-ac56-bbb755c07a02" providerId="ADAL" clId="{02B81203-7BF0-4F96-B65C-8AB01D97A066}" dt="2026-07-21T19:45:49.352" v="390" actId="165"/>
+          <ac:grpSpMkLst>
+            <pc:docMk/>
+            <pc:sldMk cId="1968028105" sldId="257"/>
+            <ac:grpSpMk id="90" creationId="{C47CD2CD-BAB5-613D-F3AD-A8396F4AFDD9}"/>
+          </ac:grpSpMkLst>
+        </pc:grpChg>
+        <pc:grpChg chg="mod">
+          <ac:chgData name="Akira Terui" userId="3f83de79-c81c-43e2-ac56-bbb755c07a02" providerId="ADAL" clId="{02B81203-7BF0-4F96-B65C-8AB01D97A066}" dt="2026-07-21T19:45:49.352" v="390" actId="165"/>
+          <ac:grpSpMkLst>
+            <pc:docMk/>
+            <pc:sldMk cId="1968028105" sldId="257"/>
+            <ac:grpSpMk id="91" creationId="{E6609927-FBBE-10A1-6A6A-9CF71058BDBF}"/>
+          </ac:grpSpMkLst>
+        </pc:grpChg>
+        <pc:grpChg chg="del mod topLvl">
+          <ac:chgData name="Akira Terui" userId="3f83de79-c81c-43e2-ac56-bbb755c07a02" providerId="ADAL" clId="{02B81203-7BF0-4F96-B65C-8AB01D97A066}" dt="2026-07-21T19:40:33.456" v="288" actId="165"/>
+          <ac:grpSpMkLst>
+            <pc:docMk/>
+            <pc:sldMk cId="1968028105" sldId="257"/>
+            <ac:grpSpMk id="120" creationId="{84CAD7C4-900F-2B76-0746-63730666B19D}"/>
+          </ac:grpSpMkLst>
+        </pc:grpChg>
+        <pc:grpChg chg="del mod topLvl">
+          <ac:chgData name="Akira Terui" userId="3f83de79-c81c-43e2-ac56-bbb755c07a02" providerId="ADAL" clId="{02B81203-7BF0-4F96-B65C-8AB01D97A066}" dt="2026-07-21T19:40:33.456" v="288" actId="165"/>
+          <ac:grpSpMkLst>
+            <pc:docMk/>
+            <pc:sldMk cId="1968028105" sldId="257"/>
+            <ac:grpSpMk id="138" creationId="{4704BA61-5B90-0E61-6A6F-872BA6DC6714}"/>
+          </ac:grpSpMkLst>
+        </pc:grpChg>
+        <pc:grpChg chg="del mod topLvl">
+          <ac:chgData name="Akira Terui" userId="3f83de79-c81c-43e2-ac56-bbb755c07a02" providerId="ADAL" clId="{02B81203-7BF0-4F96-B65C-8AB01D97A066}" dt="2026-07-21T19:40:33.456" v="288" actId="165"/>
+          <ac:grpSpMkLst>
+            <pc:docMk/>
+            <pc:sldMk cId="1968028105" sldId="257"/>
+            <ac:grpSpMk id="139" creationId="{5D8B9501-D89B-F8AC-71E8-4D50EBEA49D8}"/>
+          </ac:grpSpMkLst>
+        </pc:grpChg>
+        <pc:grpChg chg="del mod topLvl">
+          <ac:chgData name="Akira Terui" userId="3f83de79-c81c-43e2-ac56-bbb755c07a02" providerId="ADAL" clId="{02B81203-7BF0-4F96-B65C-8AB01D97A066}" dt="2026-07-21T19:40:33.456" v="288" actId="165"/>
+          <ac:grpSpMkLst>
+            <pc:docMk/>
+            <pc:sldMk cId="1968028105" sldId="257"/>
+            <ac:grpSpMk id="140" creationId="{4312A1E2-2DDE-E3E9-5622-A6F72AF43479}"/>
+          </ac:grpSpMkLst>
+        </pc:grpChg>
+        <pc:grpChg chg="del mod topLvl">
+          <ac:chgData name="Akira Terui" userId="3f83de79-c81c-43e2-ac56-bbb755c07a02" providerId="ADAL" clId="{02B81203-7BF0-4F96-B65C-8AB01D97A066}" dt="2026-07-21T19:40:33.456" v="288" actId="165"/>
+          <ac:grpSpMkLst>
+            <pc:docMk/>
+            <pc:sldMk cId="1968028105" sldId="257"/>
+            <ac:grpSpMk id="141" creationId="{63BB684F-D3C9-441D-BF3A-E7925A028D66}"/>
+          </ac:grpSpMkLst>
+        </pc:grpChg>
+        <pc:grpChg chg="del mod topLvl">
+          <ac:chgData name="Akira Terui" userId="3f83de79-c81c-43e2-ac56-bbb755c07a02" providerId="ADAL" clId="{02B81203-7BF0-4F96-B65C-8AB01D97A066}" dt="2026-07-21T19:40:33.456" v="288" actId="165"/>
+          <ac:grpSpMkLst>
+            <pc:docMk/>
+            <pc:sldMk cId="1968028105" sldId="257"/>
+            <ac:grpSpMk id="142" creationId="{564168E2-0A45-DE87-682A-AB7912316D07}"/>
+          </ac:grpSpMkLst>
+        </pc:grpChg>
+        <pc:grpChg chg="del mod topLvl">
+          <ac:chgData name="Akira Terui" userId="3f83de79-c81c-43e2-ac56-bbb755c07a02" providerId="ADAL" clId="{02B81203-7BF0-4F96-B65C-8AB01D97A066}" dt="2026-07-21T19:40:33.456" v="288" actId="165"/>
+          <ac:grpSpMkLst>
+            <pc:docMk/>
+            <pc:sldMk cId="1968028105" sldId="257"/>
+            <ac:grpSpMk id="143" creationId="{61DD7199-7B83-9E11-28FA-49C9CB9FBF6E}"/>
+          </ac:grpSpMkLst>
+        </pc:grpChg>
+        <pc:grpChg chg="del">
+          <ac:chgData name="Akira Terui" userId="3f83de79-c81c-43e2-ac56-bbb755c07a02" providerId="ADAL" clId="{02B81203-7BF0-4F96-B65C-8AB01D97A066}" dt="2026-07-21T19:40:30.512" v="287" actId="165"/>
+          <ac:grpSpMkLst>
+            <pc:docMk/>
+            <pc:sldMk cId="1968028105" sldId="257"/>
+            <ac:grpSpMk id="145" creationId="{1F210AE9-DFE4-343E-C016-17E0AB21AB1B}"/>
+          </ac:grpSpMkLst>
+        </pc:grpChg>
+        <pc:grpChg chg="mod">
+          <ac:chgData name="Akira Terui" userId="3f83de79-c81c-43e2-ac56-bbb755c07a02" providerId="ADAL" clId="{02B81203-7BF0-4F96-B65C-8AB01D97A066}" dt="2026-07-21T19:34:22.540" v="93" actId="165"/>
+          <ac:grpSpMkLst>
+            <pc:docMk/>
+            <pc:sldMk cId="1968028105" sldId="257"/>
+            <ac:grpSpMk id="154" creationId="{88FF82E5-8E45-5385-2E36-6F845C029193}"/>
+          </ac:grpSpMkLst>
+        </pc:grpChg>
+        <pc:grpChg chg="mod topLvl">
+          <ac:chgData name="Akira Terui" userId="3f83de79-c81c-43e2-ac56-bbb755c07a02" providerId="ADAL" clId="{02B81203-7BF0-4F96-B65C-8AB01D97A066}" dt="2026-07-21T19:34:22.540" v="93" actId="165"/>
+          <ac:grpSpMkLst>
+            <pc:docMk/>
+            <pc:sldMk cId="1968028105" sldId="257"/>
+            <ac:grpSpMk id="196" creationId="{AA56C434-4864-4849-BC04-99B3F6AA28C5}"/>
+          </ac:grpSpMkLst>
+        </pc:grpChg>
+        <pc:grpChg chg="mod topLvl">
+          <ac:chgData name="Akira Terui" userId="3f83de79-c81c-43e2-ac56-bbb755c07a02" providerId="ADAL" clId="{02B81203-7BF0-4F96-B65C-8AB01D97A066}" dt="2026-07-21T19:34:25.247" v="94" actId="165"/>
+          <ac:grpSpMkLst>
+            <pc:docMk/>
+            <pc:sldMk cId="1968028105" sldId="257"/>
+            <ac:grpSpMk id="198" creationId="{D802BCB6-90CF-EF85-8E52-6E917B0C45AC}"/>
+          </ac:grpSpMkLst>
+        </pc:grpChg>
+        <pc:grpChg chg="mod topLvl">
+          <ac:chgData name="Akira Terui" userId="3f83de79-c81c-43e2-ac56-bbb755c07a02" providerId="ADAL" clId="{02B81203-7BF0-4F96-B65C-8AB01D97A066}" dt="2026-07-21T19:34:25.247" v="94" actId="165"/>
+          <ac:grpSpMkLst>
+            <pc:docMk/>
+            <pc:sldMk cId="1968028105" sldId="257"/>
+            <ac:grpSpMk id="201" creationId="{E677F2EF-134E-3585-1F3D-5A9ED891E661}"/>
+          </ac:grpSpMkLst>
+        </pc:grpChg>
+        <pc:grpChg chg="del mod topLvl">
+          <ac:chgData name="Akira Terui" userId="3f83de79-c81c-43e2-ac56-bbb755c07a02" providerId="ADAL" clId="{02B81203-7BF0-4F96-B65C-8AB01D97A066}" dt="2026-07-21T19:37:04.153" v="180" actId="165"/>
+          <ac:grpSpMkLst>
+            <pc:docMk/>
+            <pc:sldMk cId="1968028105" sldId="257"/>
+            <ac:grpSpMk id="202" creationId="{282B30AF-AFFD-366F-D83B-9CC22077A862}"/>
+          </ac:grpSpMkLst>
+        </pc:grpChg>
+        <pc:grpChg chg="mod topLvl">
+          <ac:chgData name="Akira Terui" userId="3f83de79-c81c-43e2-ac56-bbb755c07a02" providerId="ADAL" clId="{02B81203-7BF0-4F96-B65C-8AB01D97A066}" dt="2026-07-21T19:45:23.781" v="389" actId="1036"/>
+          <ac:grpSpMkLst>
+            <pc:docMk/>
+            <pc:sldMk cId="1968028105" sldId="257"/>
+            <ac:grpSpMk id="203" creationId="{8240BE3F-D54D-C354-9ADB-914C474BC23E}"/>
+          </ac:grpSpMkLst>
+        </pc:grpChg>
+        <pc:grpChg chg="mod topLvl">
+          <ac:chgData name="Akira Terui" userId="3f83de79-c81c-43e2-ac56-bbb755c07a02" providerId="ADAL" clId="{02B81203-7BF0-4F96-B65C-8AB01D97A066}" dt="2026-07-21T19:34:25.247" v="94" actId="165"/>
+          <ac:grpSpMkLst>
+            <pc:docMk/>
+            <pc:sldMk cId="1968028105" sldId="257"/>
+            <ac:grpSpMk id="204" creationId="{D4CC40E6-5C7F-38CA-5609-E63A50757D27}"/>
+          </ac:grpSpMkLst>
+        </pc:grpChg>
+        <pc:grpChg chg="mod topLvl">
+          <ac:chgData name="Akira Terui" userId="3f83de79-c81c-43e2-ac56-bbb755c07a02" providerId="ADAL" clId="{02B81203-7BF0-4F96-B65C-8AB01D97A066}" dt="2026-07-21T19:34:25.247" v="94" actId="165"/>
+          <ac:grpSpMkLst>
+            <pc:docMk/>
+            <pc:sldMk cId="1968028105" sldId="257"/>
+            <ac:grpSpMk id="205" creationId="{17274BC1-005D-1300-3C1B-7AF4BBEA596B}"/>
+          </ac:grpSpMkLst>
+        </pc:grpChg>
+        <pc:grpChg chg="del mod topLvl">
+          <ac:chgData name="Akira Terui" userId="3f83de79-c81c-43e2-ac56-bbb755c07a02" providerId="ADAL" clId="{02B81203-7BF0-4F96-B65C-8AB01D97A066}" dt="2026-07-21T19:34:29.406" v="95" actId="165"/>
+          <ac:grpSpMkLst>
+            <pc:docMk/>
+            <pc:sldMk cId="1968028105" sldId="257"/>
+            <ac:grpSpMk id="206" creationId="{65E562BB-F3AB-5417-E5EA-4AE3BAFBDE94}"/>
+          </ac:grpSpMkLst>
+        </pc:grpChg>
+        <pc:grpChg chg="del mod topLvl">
+          <ac:chgData name="Akira Terui" userId="3f83de79-c81c-43e2-ac56-bbb755c07a02" providerId="ADAL" clId="{02B81203-7BF0-4F96-B65C-8AB01D97A066}" dt="2026-07-21T19:34:25.247" v="94" actId="165"/>
+          <ac:grpSpMkLst>
+            <pc:docMk/>
+            <pc:sldMk cId="1968028105" sldId="257"/>
+            <ac:grpSpMk id="223" creationId="{2545581C-406F-B719-E5A0-BA9AB8AD2ADA}"/>
+          </ac:grpSpMkLst>
+        </pc:grpChg>
+        <pc:grpChg chg="mod topLvl">
+          <ac:chgData name="Akira Terui" userId="3f83de79-c81c-43e2-ac56-bbb755c07a02" providerId="ADAL" clId="{02B81203-7BF0-4F96-B65C-8AB01D97A066}" dt="2026-07-21T19:45:49.352" v="390" actId="165"/>
+          <ac:grpSpMkLst>
+            <pc:docMk/>
+            <pc:sldMk cId="1968028105" sldId="257"/>
+            <ac:grpSpMk id="224" creationId="{CD117B1A-6B3C-8C3D-95BD-BB58378848E9}"/>
+          </ac:grpSpMkLst>
+        </pc:grpChg>
+        <pc:picChg chg="add">
+          <ac:chgData name="Akira Terui" userId="3f83de79-c81c-43e2-ac56-bbb755c07a02" providerId="ADAL" clId="{02B81203-7BF0-4F96-B65C-8AB01D97A066}" dt="2026-07-21T19:34:14.580" v="91"/>
+          <ac:picMkLst>
+            <pc:docMk/>
+            <pc:sldMk cId="1968028105" sldId="257"/>
+            <ac:picMk id="13" creationId="{BF988753-E328-282B-CCA3-142C160DA74C}"/>
+          </ac:picMkLst>
+        </pc:picChg>
+        <pc:cxnChg chg="mod">
+          <ac:chgData name="Akira Terui" userId="3f83de79-c81c-43e2-ac56-bbb755c07a02" providerId="ADAL" clId="{02B81203-7BF0-4F96-B65C-8AB01D97A066}" dt="2026-07-21T19:45:54.255" v="391" actId="165"/>
+          <ac:cxnSpMkLst>
+            <pc:docMk/>
+            <pc:sldMk cId="1968028105" sldId="257"/>
+            <ac:cxnSpMk id="79" creationId="{0D13431D-41CA-D0ED-35E6-80DFFBF5FCCE}"/>
+          </ac:cxnSpMkLst>
+        </pc:cxnChg>
+        <pc:cxnChg chg="mod">
+          <ac:chgData name="Akira Terui" userId="3f83de79-c81c-43e2-ac56-bbb755c07a02" providerId="ADAL" clId="{02B81203-7BF0-4F96-B65C-8AB01D97A066}" dt="2026-07-21T19:45:54.255" v="391" actId="165"/>
+          <ac:cxnSpMkLst>
+            <pc:docMk/>
+            <pc:sldMk cId="1968028105" sldId="257"/>
+            <ac:cxnSpMk id="80" creationId="{D44F4992-EC92-91C1-7599-F786CC6AF606}"/>
+          </ac:cxnSpMkLst>
+        </pc:cxnChg>
+        <pc:cxnChg chg="mod topLvl">
+          <ac:chgData name="Akira Terui" userId="3f83de79-c81c-43e2-ac56-bbb755c07a02" providerId="ADAL" clId="{02B81203-7BF0-4F96-B65C-8AB01D97A066}" dt="2026-07-21T19:51:19.830" v="558" actId="1038"/>
+          <ac:cxnSpMkLst>
+            <pc:docMk/>
+            <pc:sldMk cId="1968028105" sldId="257"/>
+            <ac:cxnSpMk id="82" creationId="{297008A4-126C-7B11-CB58-39A24B9BDBF7}"/>
+          </ac:cxnSpMkLst>
+        </pc:cxnChg>
+        <pc:cxnChg chg="mod topLvl">
+          <ac:chgData name="Akira Terui" userId="3f83de79-c81c-43e2-ac56-bbb755c07a02" providerId="ADAL" clId="{02B81203-7BF0-4F96-B65C-8AB01D97A066}" dt="2026-07-21T19:45:54.255" v="391" actId="165"/>
+          <ac:cxnSpMkLst>
+            <pc:docMk/>
+            <pc:sldMk cId="1968028105" sldId="257"/>
+            <ac:cxnSpMk id="83" creationId="{428A9FE4-71AE-7EC6-768B-A474E74C9F9B}"/>
+          </ac:cxnSpMkLst>
+        </pc:cxnChg>
+        <pc:cxnChg chg="mod topLvl">
+          <ac:chgData name="Akira Terui" userId="3f83de79-c81c-43e2-ac56-bbb755c07a02" providerId="ADAL" clId="{02B81203-7BF0-4F96-B65C-8AB01D97A066}" dt="2026-07-21T19:51:19.830" v="558" actId="1038"/>
+          <ac:cxnSpMkLst>
+            <pc:docMk/>
+            <pc:sldMk cId="1968028105" sldId="257"/>
+            <ac:cxnSpMk id="84" creationId="{5563BB7E-700D-C6DF-387E-EF2BEDF37375}"/>
+          </ac:cxnSpMkLst>
+        </pc:cxnChg>
+        <pc:cxnChg chg="mod topLvl">
+          <ac:chgData name="Akira Terui" userId="3f83de79-c81c-43e2-ac56-bbb755c07a02" providerId="ADAL" clId="{02B81203-7BF0-4F96-B65C-8AB01D97A066}" dt="2026-07-21T19:45:54.255" v="391" actId="165"/>
+          <ac:cxnSpMkLst>
+            <pc:docMk/>
+            <pc:sldMk cId="1968028105" sldId="257"/>
+            <ac:cxnSpMk id="85" creationId="{494012B2-ABB0-F399-0892-DE424340914B}"/>
+          </ac:cxnSpMkLst>
+        </pc:cxnChg>
+        <pc:cxnChg chg="mod topLvl">
+          <ac:chgData name="Akira Terui" userId="3f83de79-c81c-43e2-ac56-bbb755c07a02" providerId="ADAL" clId="{02B81203-7BF0-4F96-B65C-8AB01D97A066}" dt="2026-07-21T19:45:54.255" v="391" actId="165"/>
+          <ac:cxnSpMkLst>
+            <pc:docMk/>
+            <pc:sldMk cId="1968028105" sldId="257"/>
+            <ac:cxnSpMk id="86" creationId="{C5397407-8494-643A-6608-157F1AA286DD}"/>
+          </ac:cxnSpMkLst>
+        </pc:cxnChg>
+        <pc:cxnChg chg="mod">
+          <ac:chgData name="Akira Terui" userId="3f83de79-c81c-43e2-ac56-bbb755c07a02" providerId="ADAL" clId="{02B81203-7BF0-4F96-B65C-8AB01D97A066}" dt="2026-07-21T19:44:18.378" v="339" actId="1035"/>
+          <ac:cxnSpMkLst>
+            <pc:docMk/>
+            <pc:sldMk cId="1968028105" sldId="257"/>
+            <ac:cxnSpMk id="127" creationId="{5289B8CB-14F2-AAB7-21CF-401393870D0E}"/>
+          </ac:cxnSpMkLst>
+        </pc:cxnChg>
+        <pc:cxnChg chg="mod">
+          <ac:chgData name="Akira Terui" userId="3f83de79-c81c-43e2-ac56-bbb755c07a02" providerId="ADAL" clId="{02B81203-7BF0-4F96-B65C-8AB01D97A066}" dt="2026-07-21T19:42:13.733" v="326" actId="1038"/>
+          <ac:cxnSpMkLst>
+            <pc:docMk/>
+            <pc:sldMk cId="1968028105" sldId="257"/>
+            <ac:cxnSpMk id="128" creationId="{F5AD59B7-1E1B-780F-2339-045354974A2F}"/>
+          </ac:cxnSpMkLst>
+        </pc:cxnChg>
+        <pc:cxnChg chg="mod topLvl">
+          <ac:chgData name="Akira Terui" userId="3f83de79-c81c-43e2-ac56-bbb755c07a02" providerId="ADAL" clId="{02B81203-7BF0-4F96-B65C-8AB01D97A066}" dt="2026-07-21T19:40:33.456" v="288" actId="165"/>
+          <ac:cxnSpMkLst>
+            <pc:docMk/>
+            <pc:sldMk cId="1968028105" sldId="257"/>
+            <ac:cxnSpMk id="130" creationId="{B3EA02EE-0E4A-8E74-3732-DD0F1EA4E176}"/>
+          </ac:cxnSpMkLst>
+        </pc:cxnChg>
+        <pc:cxnChg chg="mod topLvl">
+          <ac:chgData name="Akira Terui" userId="3f83de79-c81c-43e2-ac56-bbb755c07a02" providerId="ADAL" clId="{02B81203-7BF0-4F96-B65C-8AB01D97A066}" dt="2026-07-21T19:40:33.456" v="288" actId="165"/>
+          <ac:cxnSpMkLst>
+            <pc:docMk/>
+            <pc:sldMk cId="1968028105" sldId="257"/>
+            <ac:cxnSpMk id="134" creationId="{6A747C4E-7C5C-18F3-7804-42C4A650FB78}"/>
+          </ac:cxnSpMkLst>
+        </pc:cxnChg>
+        <pc:cxnChg chg="mod topLvl">
+          <ac:chgData name="Akira Terui" userId="3f83de79-c81c-43e2-ac56-bbb755c07a02" providerId="ADAL" clId="{02B81203-7BF0-4F96-B65C-8AB01D97A066}" dt="2026-07-21T19:35:24.313" v="120" actId="1038"/>
+          <ac:cxnSpMkLst>
+            <pc:docMk/>
+            <pc:sldMk cId="1968028105" sldId="257"/>
+            <ac:cxnSpMk id="207" creationId="{E0AE1D32-642D-690A-AC2C-EA1CE4A7A958}"/>
+          </ac:cxnSpMkLst>
+        </pc:cxnChg>
+        <pc:cxnChg chg="mod topLvl">
+          <ac:chgData name="Akira Terui" userId="3f83de79-c81c-43e2-ac56-bbb755c07a02" providerId="ADAL" clId="{02B81203-7BF0-4F96-B65C-8AB01D97A066}" dt="2026-07-21T19:42:54.208" v="334" actId="1035"/>
+          <ac:cxnSpMkLst>
+            <pc:docMk/>
+            <pc:sldMk cId="1968028105" sldId="257"/>
+            <ac:cxnSpMk id="208" creationId="{AE1A8A68-1B03-4B9F-5C77-F03E1076CC93}"/>
+          </ac:cxnSpMkLst>
+        </pc:cxnChg>
+        <pc:cxnChg chg="mod">
+          <ac:chgData name="Akira Terui" userId="3f83de79-c81c-43e2-ac56-bbb755c07a02" providerId="ADAL" clId="{02B81203-7BF0-4F96-B65C-8AB01D97A066}" dt="2026-07-21T19:34:25.247" v="94" actId="165"/>
+          <ac:cxnSpMkLst>
+            <pc:docMk/>
+            <pc:sldMk cId="1968028105" sldId="257"/>
+            <ac:cxnSpMk id="213" creationId="{546CA241-611A-BC54-1F84-88E9F323724C}"/>
+          </ac:cxnSpMkLst>
+        </pc:cxnChg>
+        <pc:cxnChg chg="mod topLvl">
+          <ac:chgData name="Akira Terui" userId="3f83de79-c81c-43e2-ac56-bbb755c07a02" providerId="ADAL" clId="{02B81203-7BF0-4F96-B65C-8AB01D97A066}" dt="2026-07-21T19:45:05.803" v="356" actId="1038"/>
+          <ac:cxnSpMkLst>
+            <pc:docMk/>
+            <pc:sldMk cId="1968028105" sldId="257"/>
+            <ac:cxnSpMk id="215" creationId="{906B082C-B394-F19D-5A77-AC0865E9AC18}"/>
+          </ac:cxnSpMkLst>
+        </pc:cxnChg>
+        <pc:cxnChg chg="mod topLvl">
+          <ac:chgData name="Akira Terui" userId="3f83de79-c81c-43e2-ac56-bbb755c07a02" providerId="ADAL" clId="{02B81203-7BF0-4F96-B65C-8AB01D97A066}" dt="2026-07-21T19:45:23.781" v="389" actId="1036"/>
+          <ac:cxnSpMkLst>
+            <pc:docMk/>
+            <pc:sldMk cId="1968028105" sldId="257"/>
+            <ac:cxnSpMk id="216" creationId="{AAD8091C-C449-D314-FA61-F16CF697E60C}"/>
           </ac:cxnSpMkLst>
         </pc:cxnChg>
       </pc:sldChg>
@@ -1803,7 +2378,7 @@
           <a:p>
             <a:fld id="{CF537AFE-EDF6-42DC-A53E-DD7BA9858939}" type="datetimeFigureOut">
               <a:rPr lang="en-US" smtClean="0"/>
-              <a:t>7/3/2026</a:t>
+              <a:t>7/21/2026</a:t>
             </a:fld>
             <a:endParaRPr lang="en-US"/>
           </a:p>
@@ -1973,7 +2548,7 @@
           <a:p>
             <a:fld id="{CF537AFE-EDF6-42DC-A53E-DD7BA9858939}" type="datetimeFigureOut">
               <a:rPr lang="en-US" smtClean="0"/>
-              <a:t>7/3/2026</a:t>
+              <a:t>7/21/2026</a:t>
             </a:fld>
             <a:endParaRPr lang="en-US"/>
           </a:p>
@@ -2153,7 +2728,7 @@
           <a:p>
             <a:fld id="{CF537AFE-EDF6-42DC-A53E-DD7BA9858939}" type="datetimeFigureOut">
               <a:rPr lang="en-US" smtClean="0"/>
-              <a:t>7/3/2026</a:t>
+              <a:t>7/21/2026</a:t>
             </a:fld>
             <a:endParaRPr lang="en-US"/>
           </a:p>
@@ -2323,7 +2898,7 @@
           <a:p>
             <a:fld id="{CF537AFE-EDF6-42DC-A53E-DD7BA9858939}" type="datetimeFigureOut">
               <a:rPr lang="en-US" smtClean="0"/>
-              <a:t>7/3/2026</a:t>
+              <a:t>7/21/2026</a:t>
             </a:fld>
             <a:endParaRPr lang="en-US"/>
           </a:p>
@@ -2569,7 +3144,7 @@
           <a:p>
             <a:fld id="{CF537AFE-EDF6-42DC-A53E-DD7BA9858939}" type="datetimeFigureOut">
               <a:rPr lang="en-US" smtClean="0"/>
-              <a:t>7/3/2026</a:t>
+              <a:t>7/21/2026</a:t>
             </a:fld>
             <a:endParaRPr lang="en-US"/>
           </a:p>
@@ -2801,7 +3376,7 @@
           <a:p>
             <a:fld id="{CF537AFE-EDF6-42DC-A53E-DD7BA9858939}" type="datetimeFigureOut">
               <a:rPr lang="en-US" smtClean="0"/>
-              <a:t>7/3/2026</a:t>
+              <a:t>7/21/2026</a:t>
             </a:fld>
             <a:endParaRPr lang="en-US"/>
           </a:p>
@@ -3168,7 +3743,7 @@
           <a:p>
             <a:fld id="{CF537AFE-EDF6-42DC-A53E-DD7BA9858939}" type="datetimeFigureOut">
               <a:rPr lang="en-US" smtClean="0"/>
-              <a:t>7/3/2026</a:t>
+              <a:t>7/21/2026</a:t>
             </a:fld>
             <a:endParaRPr lang="en-US"/>
           </a:p>
@@ -3286,7 +3861,7 @@
           <a:p>
             <a:fld id="{CF537AFE-EDF6-42DC-A53E-DD7BA9858939}" type="datetimeFigureOut">
               <a:rPr lang="en-US" smtClean="0"/>
-              <a:t>7/3/2026</a:t>
+              <a:t>7/21/2026</a:t>
             </a:fld>
             <a:endParaRPr lang="en-US"/>
           </a:p>
@@ -3381,7 +3956,7 @@
           <a:p>
             <a:fld id="{CF537AFE-EDF6-42DC-A53E-DD7BA9858939}" type="datetimeFigureOut">
               <a:rPr lang="en-US" smtClean="0"/>
-              <a:t>7/3/2026</a:t>
+              <a:t>7/21/2026</a:t>
             </a:fld>
             <a:endParaRPr lang="en-US"/>
           </a:p>
@@ -3658,7 +4233,7 @@
           <a:p>
             <a:fld id="{CF537AFE-EDF6-42DC-A53E-DD7BA9858939}" type="datetimeFigureOut">
               <a:rPr lang="en-US" smtClean="0"/>
-              <a:t>7/3/2026</a:t>
+              <a:t>7/21/2026</a:t>
             </a:fld>
             <a:endParaRPr lang="en-US"/>
           </a:p>
@@ -3915,7 +4490,7 @@
           <a:p>
             <a:fld id="{CF537AFE-EDF6-42DC-A53E-DD7BA9858939}" type="datetimeFigureOut">
               <a:rPr lang="en-US" smtClean="0"/>
-              <a:t>7/3/2026</a:t>
+              <a:t>7/21/2026</a:t>
             </a:fld>
             <a:endParaRPr lang="en-US"/>
           </a:p>
@@ -4128,7 +4703,7 @@
           <a:p>
             <a:fld id="{CF537AFE-EDF6-42DC-A53E-DD7BA9858939}" type="datetimeFigureOut">
               <a:rPr lang="en-US" smtClean="0"/>
-              <a:t>7/3/2026</a:t>
+              <a:t>7/21/2026</a:t>
             </a:fld>
             <a:endParaRPr lang="en-US"/>
           </a:p>
@@ -4553,8 +5128,8 @@
             <a:chExt cx="8167132" cy="5218572"/>
           </a:xfrm>
         </p:grpSpPr>
-        <mc:AlternateContent xmlns:mc="http://schemas.openxmlformats.org/markup-compatibility/2006">
-          <mc:Choice xmlns:a14="http://schemas.microsoft.com/office/drawing/2010/main" Requires="a14">
+        <mc:AlternateContent xmlns:mc="http://schemas.openxmlformats.org/markup-compatibility/2006" xmlns:a14="http://schemas.microsoft.com/office/drawing/2010/main">
+          <mc:Choice Requires="a14">
             <p:sp>
               <p:nvSpPr>
                 <p:cNvPr id="7" name="TextBox 6">
@@ -4627,7 +5202,7 @@
               </p:txBody>
             </p:sp>
           </mc:Choice>
-          <mc:Fallback>
+          <mc:Fallback xmlns="">
             <p:sp>
               <p:nvSpPr>
                 <p:cNvPr id="7" name="TextBox 6">
@@ -4826,8 +5401,8 @@
             </p:sp>
           </mc:Fallback>
         </mc:AlternateContent>
-        <mc:AlternateContent xmlns:mc="http://schemas.openxmlformats.org/markup-compatibility/2006">
-          <mc:Choice xmlns:a14="http://schemas.microsoft.com/office/drawing/2010/main" Requires="a14">
+        <mc:AlternateContent xmlns:mc="http://schemas.openxmlformats.org/markup-compatibility/2006" xmlns:a14="http://schemas.microsoft.com/office/drawing/2010/main">
+          <mc:Choice Requires="a14">
             <p:sp>
               <p:nvSpPr>
                 <p:cNvPr id="63" name="TextBox 62">
@@ -4915,7 +5490,7 @@
               </p:txBody>
             </p:sp>
           </mc:Choice>
-          <mc:Fallback>
+          <mc:Fallback xmlns="">
             <p:sp>
               <p:nvSpPr>
                 <p:cNvPr id="63" name="TextBox 62">
@@ -5159,8 +5734,8 @@
             </p:sp>
           </mc:Fallback>
         </mc:AlternateContent>
-        <mc:AlternateContent xmlns:mc="http://schemas.openxmlformats.org/markup-compatibility/2006">
-          <mc:Choice xmlns:a14="http://schemas.microsoft.com/office/drawing/2010/main" Requires="a14">
+        <mc:AlternateContent xmlns:mc="http://schemas.openxmlformats.org/markup-compatibility/2006" xmlns:a14="http://schemas.microsoft.com/office/drawing/2010/main">
+          <mc:Choice Requires="a14">
             <p:sp>
               <p:nvSpPr>
                 <p:cNvPr id="58" name="TextBox 57">
@@ -5281,7 +5856,7 @@
               </p:txBody>
             </p:sp>
           </mc:Choice>
-          <mc:Fallback>
+          <mc:Fallback xmlns="">
             <p:sp>
               <p:nvSpPr>
                 <p:cNvPr id="58" name="TextBox 57">
@@ -6630,8 +7205,8 @@
             <a:xfrm>
               <a:off x="4949743" y="3497711"/>
               <a:ext cx="2730618" cy="1178886"/>
-              <a:chOff x="4889735" y="4505267"/>
-              <a:chExt cx="2940666" cy="1269569"/>
+              <a:chOff x="4889734" y="4505270"/>
+              <a:chExt cx="2940667" cy="1269567"/>
             </a:xfrm>
           </p:grpSpPr>
           <p:grpSp>
@@ -6648,10 +7223,10 @@
             </p:nvGrpSpPr>
             <p:grpSpPr>
               <a:xfrm>
-                <a:off x="4889735" y="4950197"/>
-                <a:ext cx="706633" cy="824639"/>
-                <a:chOff x="4579733" y="6772415"/>
-                <a:chExt cx="743824" cy="868041"/>
+                <a:off x="4889734" y="4950197"/>
+                <a:ext cx="706633" cy="824640"/>
+                <a:chOff x="4579737" y="6772389"/>
+                <a:chExt cx="743820" cy="868039"/>
               </a:xfrm>
             </p:grpSpPr>
             <p:grpSp>
@@ -6668,8 +7243,8 @@
               </p:nvGrpSpPr>
               <p:grpSpPr>
                 <a:xfrm rot="18900000">
-                  <a:off x="4718950" y="7343842"/>
-                  <a:ext cx="90000" cy="182880"/>
+                  <a:off x="4718954" y="7343815"/>
+                  <a:ext cx="90000" cy="182879"/>
                   <a:chOff x="4760548" y="6991109"/>
                   <a:chExt cx="90000" cy="182880"/>
                 </a:xfrm>
@@ -6834,8 +7409,8 @@
               </p:nvCxnSpPr>
               <p:spPr>
                 <a:xfrm rot="1716689" flipV="1">
-                  <a:off x="4883386" y="7288653"/>
-                  <a:ext cx="0" cy="228600"/>
+                  <a:off x="4883390" y="7288626"/>
+                  <a:ext cx="0" cy="228599"/>
                 </a:xfrm>
                 <a:prstGeom prst="line">
                   <a:avLst/>
@@ -6880,7 +7455,7 @@
               </p:nvCxnSpPr>
               <p:spPr>
                 <a:xfrm flipV="1">
-                  <a:off x="4829826" y="7503296"/>
+                  <a:off x="4829830" y="7503268"/>
                   <a:ext cx="0" cy="137160"/>
                 </a:xfrm>
                 <a:prstGeom prst="line">
@@ -6924,8 +7499,8 @@
               </p:nvGrpSpPr>
               <p:grpSpPr>
                 <a:xfrm>
-                  <a:off x="4674520" y="6918126"/>
-                  <a:ext cx="226879" cy="155448"/>
+                  <a:off x="4674524" y="6918101"/>
+                  <a:ext cx="226880" cy="155447"/>
                   <a:chOff x="5022208" y="7241941"/>
                   <a:chExt cx="226879" cy="155448"/>
                 </a:xfrm>
@@ -7037,8 +7612,8 @@
               </p:nvGrpSpPr>
               <p:grpSpPr>
                 <a:xfrm rot="19669366">
-                  <a:off x="4579733" y="7165546"/>
-                  <a:ext cx="91440" cy="237744"/>
+                  <a:off x="4579737" y="7165517"/>
+                  <a:ext cx="91440" cy="237743"/>
                   <a:chOff x="5432164" y="7234966"/>
                   <a:chExt cx="91440" cy="237744"/>
                 </a:xfrm>
@@ -7152,7 +7727,7 @@
               </p:nvGrpSpPr>
               <p:grpSpPr>
                 <a:xfrm rot="2130009">
-                  <a:off x="4728844" y="6772415"/>
+                  <a:off x="4728849" y="6772389"/>
                   <a:ext cx="274320" cy="98861"/>
                   <a:chOff x="5617265" y="7299550"/>
                   <a:chExt cx="274320" cy="98861"/>
@@ -7265,7 +7840,7 @@
               </p:nvGrpSpPr>
               <p:grpSpPr>
                 <a:xfrm rot="3548578">
-                  <a:off x="5077609" y="7127751"/>
+                  <a:off x="5077615" y="7127724"/>
                   <a:ext cx="120156" cy="182880"/>
                   <a:chOff x="6041764" y="7234966"/>
                   <a:chExt cx="120156" cy="182880"/>
@@ -7378,8 +7953,8 @@
               </p:nvGrpSpPr>
               <p:grpSpPr>
                 <a:xfrm rot="1716689">
-                  <a:off x="4895143" y="7119349"/>
-                  <a:ext cx="199071" cy="228600"/>
+                  <a:off x="4895152" y="7119331"/>
+                  <a:ext cx="199071" cy="228599"/>
                   <a:chOff x="6216073" y="7156917"/>
                   <a:chExt cx="199071" cy="228600"/>
                 </a:xfrm>
@@ -7491,8 +8066,8 @@
               </p:nvGrpSpPr>
               <p:grpSpPr>
                 <a:xfrm rot="1758806">
-                  <a:off x="5102801" y="6946852"/>
-                  <a:ext cx="220756" cy="182880"/>
+                  <a:off x="5102801" y="6946853"/>
+                  <a:ext cx="220756" cy="182879"/>
                   <a:chOff x="5410200" y="7295171"/>
                   <a:chExt cx="220756" cy="182880"/>
                 </a:xfrm>
@@ -7605,10 +8180,10 @@
             </p:nvGrpSpPr>
             <p:grpSpPr>
               <a:xfrm>
-                <a:off x="5974055" y="4505267"/>
-                <a:ext cx="461293" cy="1269561"/>
-                <a:chOff x="4823530" y="5472274"/>
-                <a:chExt cx="485571" cy="1336380"/>
+                <a:off x="5974052" y="4505270"/>
+                <a:ext cx="461292" cy="1269562"/>
+                <a:chOff x="4823542" y="5472274"/>
+                <a:chExt cx="485559" cy="1336395"/>
               </a:xfrm>
             </p:grpSpPr>
             <p:grpSp>
@@ -7625,7 +8200,7 @@
               </p:nvGrpSpPr>
               <p:grpSpPr>
                 <a:xfrm rot="18900000">
-                  <a:off x="5121394" y="6512040"/>
+                  <a:off x="5121412" y="6512051"/>
                   <a:ext cx="90000" cy="182880"/>
                   <a:chOff x="4760548" y="6991109"/>
                   <a:chExt cx="90000" cy="182880"/>
@@ -7791,7 +8366,7 @@
               </p:nvCxnSpPr>
               <p:spPr>
                 <a:xfrm rot="1716689" flipV="1">
-                  <a:off x="5285830" y="6456851"/>
+                  <a:off x="5285848" y="6456862"/>
                   <a:ext cx="0" cy="228600"/>
                 </a:xfrm>
                 <a:prstGeom prst="line">
@@ -7837,8 +8412,8 @@
               </p:nvCxnSpPr>
               <p:spPr>
                 <a:xfrm flipV="1">
-                  <a:off x="5232270" y="6671494"/>
-                  <a:ext cx="0" cy="137160"/>
+                  <a:off x="5232288" y="6671508"/>
+                  <a:ext cx="0" cy="137161"/>
                 </a:xfrm>
                 <a:prstGeom prst="line">
                   <a:avLst/>
@@ -7881,8 +8456,8 @@
               </p:nvGrpSpPr>
               <p:grpSpPr>
                 <a:xfrm>
-                  <a:off x="4823530" y="6023264"/>
-                  <a:ext cx="226879" cy="155448"/>
+                  <a:off x="4823542" y="6023276"/>
+                  <a:ext cx="226880" cy="155448"/>
                   <a:chOff x="5022208" y="7241941"/>
                   <a:chExt cx="226879" cy="155448"/>
                 </a:xfrm>
@@ -7990,7 +8565,7 @@
               </p:nvGrpSpPr>
               <p:grpSpPr>
                 <a:xfrm rot="19669366">
-                  <a:off x="4984558" y="6336125"/>
+                  <a:off x="4984571" y="6336140"/>
                   <a:ext cx="91440" cy="237744"/>
                   <a:chOff x="5432164" y="7234966"/>
                   <a:chExt cx="91440" cy="237744"/>
@@ -8105,8 +8680,8 @@
               </p:nvGrpSpPr>
               <p:grpSpPr>
                 <a:xfrm rot="2130009">
-                  <a:off x="4880213" y="5881350"/>
-                  <a:ext cx="274320" cy="98861"/>
+                  <a:off x="4880225" y="5881364"/>
+                  <a:ext cx="274320" cy="98862"/>
                   <a:chOff x="5617265" y="7299550"/>
                   <a:chExt cx="274320" cy="98861"/>
                 </a:xfrm>
@@ -8214,8 +8789,8 @@
               </p:nvGrpSpPr>
               <p:grpSpPr>
                 <a:xfrm rot="21356477">
-                  <a:off x="4947085" y="5592089"/>
-                  <a:ext cx="120156" cy="182880"/>
+                  <a:off x="4947101" y="5592102"/>
+                  <a:ext cx="120157" cy="182880"/>
                   <a:chOff x="6041764" y="7234966"/>
                   <a:chExt cx="120156" cy="182880"/>
                 </a:xfrm>
@@ -8323,8 +8898,8 @@
               </p:nvGrpSpPr>
               <p:grpSpPr>
                 <a:xfrm rot="1716689">
-                  <a:off x="5046561" y="6225122"/>
-                  <a:ext cx="199071" cy="228600"/>
+                  <a:off x="5046569" y="6225138"/>
+                  <a:ext cx="199071" cy="228601"/>
                   <a:chOff x="6216073" y="7156917"/>
                   <a:chExt cx="199071" cy="228600"/>
                 </a:xfrm>
@@ -8544,8 +9119,8 @@
               <a:xfrm>
                 <a:off x="6813031" y="5159452"/>
                 <a:ext cx="1017370" cy="615382"/>
-                <a:chOff x="5908920" y="6143160"/>
-                <a:chExt cx="1070915" cy="647770"/>
+                <a:chOff x="5908926" y="6143178"/>
+                <a:chExt cx="1070909" cy="647765"/>
               </a:xfrm>
             </p:grpSpPr>
             <p:grpSp>
@@ -8562,7 +9137,7 @@
               </p:nvGrpSpPr>
               <p:grpSpPr>
                 <a:xfrm rot="2959335">
-                  <a:off x="6472302" y="6496591"/>
+                  <a:off x="6472306" y="6496609"/>
                   <a:ext cx="90000" cy="182880"/>
                   <a:chOff x="4760548" y="6991109"/>
                   <a:chExt cx="90000" cy="182880"/>
@@ -8725,9 +9300,9 @@
                 <p:nvPr/>
               </p:nvCxnSpPr>
               <p:spPr>
-                <a:xfrm rot="-1200000" flipV="1">
-                  <a:off x="6405145" y="6425907"/>
-                  <a:ext cx="0" cy="228600"/>
+                <a:xfrm rot="20400000" flipV="1">
+                  <a:off x="6405149" y="6425924"/>
+                  <a:ext cx="0" cy="228601"/>
                 </a:xfrm>
                 <a:prstGeom prst="line">
                   <a:avLst/>
@@ -8772,8 +9347,8 @@
               </p:nvCxnSpPr>
               <p:spPr>
                 <a:xfrm flipV="1">
-                  <a:off x="6447083" y="6653770"/>
-                  <a:ext cx="0" cy="137160"/>
+                  <a:off x="6447087" y="6653782"/>
+                  <a:ext cx="0" cy="137161"/>
                 </a:xfrm>
                 <a:prstGeom prst="line">
                   <a:avLst/>
@@ -8816,7 +9391,7 @@
               </p:nvGrpSpPr>
               <p:grpSpPr>
                 <a:xfrm>
-                  <a:off x="6330798" y="6143160"/>
+                  <a:off x="6330802" y="6143178"/>
                   <a:ext cx="226879" cy="155448"/>
                   <a:chOff x="5022208" y="7241941"/>
                   <a:chExt cx="226879" cy="155448"/>
@@ -8925,7 +9500,7 @@
               </p:nvGrpSpPr>
               <p:grpSpPr>
                 <a:xfrm rot="19669366">
-                  <a:off x="6254090" y="6225449"/>
+                  <a:off x="6254094" y="6225467"/>
                   <a:ext cx="91440" cy="237744"/>
                   <a:chOff x="5432164" y="7234966"/>
                   <a:chExt cx="91440" cy="237744"/>
@@ -9038,8 +9613,8 @@
               </p:nvGrpSpPr>
               <p:grpSpPr>
                 <a:xfrm rot="19001967">
-                  <a:off x="5908920" y="6304732"/>
-                  <a:ext cx="274320" cy="98861"/>
+                  <a:off x="5908926" y="6304750"/>
+                  <a:ext cx="274321" cy="98862"/>
                   <a:chOff x="5617265" y="7299550"/>
                   <a:chExt cx="274320" cy="98861"/>
                 </a:xfrm>
@@ -9151,8 +9726,8 @@
               </p:nvGrpSpPr>
               <p:grpSpPr>
                 <a:xfrm rot="3548578">
-                  <a:off x="6733887" y="6352785"/>
-                  <a:ext cx="120156" cy="182880"/>
+                  <a:off x="6733894" y="6352803"/>
+                  <a:ext cx="120157" cy="182880"/>
                   <a:chOff x="6041764" y="7234966"/>
                   <a:chExt cx="120156" cy="182880"/>
                 </a:xfrm>
@@ -9260,8 +9835,8 @@
               </p:nvGrpSpPr>
               <p:grpSpPr>
                 <a:xfrm rot="1716689">
-                  <a:off x="6551421" y="6344383"/>
-                  <a:ext cx="199071" cy="228600"/>
+                  <a:off x="6551435" y="6344398"/>
+                  <a:ext cx="199071" cy="228601"/>
                   <a:chOff x="6216073" y="7156917"/>
                   <a:chExt cx="199071" cy="228600"/>
                 </a:xfrm>
@@ -9369,10 +9944,10 @@
               </p:nvGrpSpPr>
               <p:grpSpPr>
                 <a:xfrm rot="1758806">
-                  <a:off x="6759079" y="6171886"/>
-                  <a:ext cx="220756" cy="182880"/>
-                  <a:chOff x="5410200" y="7295171"/>
-                  <a:chExt cx="220756" cy="182880"/>
+                  <a:off x="6759078" y="6171885"/>
+                  <a:ext cx="220757" cy="182880"/>
+                  <a:chOff x="5410200" y="6424605"/>
+                  <a:chExt cx="226731" cy="182880"/>
                 </a:xfrm>
               </p:grpSpPr>
               <p:cxnSp>
@@ -9390,8 +9965,8 @@
                   <p:nvPr/>
                 </p:nvCxnSpPr>
                 <p:spPr>
-                  <a:xfrm rot="-2700000" flipV="1">
-                    <a:off x="5410200" y="7295171"/>
+                  <a:xfrm rot="18900000" flipV="1">
+                    <a:off x="5410200" y="6424605"/>
                     <a:ext cx="0" cy="182880"/>
                   </a:xfrm>
                   <a:prstGeom prst="line">
@@ -9435,7 +10010,7 @@
                 </p:nvCxnSpPr>
                 <p:spPr>
                   <a:xfrm rot="2700000" flipV="1">
-                    <a:off x="5539516" y="7295171"/>
+                    <a:off x="5545491" y="6433992"/>
                     <a:ext cx="0" cy="182880"/>
                   </a:xfrm>
                   <a:prstGeom prst="line">
@@ -10355,8 +10930,8 @@
             </p:style>
           </p:cxnSp>
         </p:grpSp>
-        <mc:AlternateContent xmlns:mc="http://schemas.openxmlformats.org/markup-compatibility/2006">
-          <mc:Choice xmlns:a14="http://schemas.microsoft.com/office/drawing/2010/main" Requires="a14">
+        <mc:AlternateContent xmlns:mc="http://schemas.openxmlformats.org/markup-compatibility/2006" xmlns:a14="http://schemas.microsoft.com/office/drawing/2010/main">
+          <mc:Choice Requires="a14">
             <p:sp>
               <p:nvSpPr>
                 <p:cNvPr id="29" name="TextBox 28">
@@ -10429,7 +11004,7 @@
               </p:txBody>
             </p:sp>
           </mc:Choice>
-          <mc:Fallback>
+          <mc:Fallback xmlns="">
             <p:sp>
               <p:nvSpPr>
                 <p:cNvPr id="29" name="TextBox 28">
@@ -10520,51 +11095,66 @@
             </a:fontRef>
           </p:style>
         </p:cxnSp>
-        <p:sp>
-          <p:nvSpPr>
-            <p:cNvPr id="100" name="TextBox 99">
-              <a:extLst>
-                <a:ext uri="{FF2B5EF4-FFF2-40B4-BE49-F238E27FC236}">
-                  <a16:creationId xmlns:a16="http://schemas.microsoft.com/office/drawing/2014/main" id="{09F36B01-58AA-076E-1E9B-6370D7B3676C}"/>
-                </a:ext>
-              </a:extLst>
-            </p:cNvPr>
-            <p:cNvSpPr txBox="1"/>
-            <p:nvPr/>
-          </p:nvSpPr>
-          <p:spPr>
-            <a:xfrm>
-              <a:off x="4435670" y="4861426"/>
-              <a:ext cx="3778599" cy="378117"/>
-            </a:xfrm>
-            <a:prstGeom prst="rect">
-              <a:avLst/>
-            </a:prstGeom>
-            <a:noFill/>
-          </p:spPr>
-          <p:txBody>
-            <a:bodyPr wrap="none" rtlCol="0">
-              <a:spAutoFit/>
-            </a:bodyPr>
-            <a:lstStyle/>
-            <a:p>
-              <a:r>
-                <a:rPr lang="en-US" sz="1857" dirty="0">
-                  <a:solidFill>
-                    <a:schemeClr val="tx1">
-                      <a:lumMod val="75000"/>
-                      <a:lumOff val="25000"/>
-                    </a:schemeClr>
-                  </a:solidFill>
-                  <a:latin typeface="Arial" panose="020B0604020202020204" pitchFamily="34" charset="0"/>
-                  <a:cs typeface="Arial" panose="020B0604020202020204" pitchFamily="34" charset="0"/>
-                </a:rPr>
-                <a:t>Random topology and link lengths</a:t>
-              </a:r>
-            </a:p>
-          </p:txBody>
-        </p:sp>
       </p:grpSp>
+      <p:sp>
+        <p:nvSpPr>
+          <p:cNvPr id="13" name="TextBox 12">
+            <a:extLst>
+              <a:ext uri="{FF2B5EF4-FFF2-40B4-BE49-F238E27FC236}">
+                <a16:creationId xmlns:a16="http://schemas.microsoft.com/office/drawing/2014/main" id="{27B9A9B9-B31E-3B76-CC1A-0B2743660B36}"/>
+              </a:ext>
+            </a:extLst>
+          </p:cNvPr>
+          <p:cNvSpPr txBox="1"/>
+          <p:nvPr/>
+        </p:nvSpPr>
+        <p:spPr>
+          <a:xfrm>
+            <a:off x="4407696" y="4803712"/>
+            <a:ext cx="3520131" cy="663900"/>
+          </a:xfrm>
+          <a:prstGeom prst="rect">
+            <a:avLst/>
+          </a:prstGeom>
+          <a:noFill/>
+        </p:spPr>
+        <p:txBody>
+          <a:bodyPr wrap="none" rtlCol="0">
+            <a:spAutoFit/>
+          </a:bodyPr>
+          <a:lstStyle/>
+          <a:p>
+            <a:r>
+              <a:rPr lang="en-US" sz="1857" dirty="0">
+                <a:solidFill>
+                  <a:schemeClr val="tx1">
+                    <a:lumMod val="75000"/>
+                    <a:lumOff val="25000"/>
+                  </a:schemeClr>
+                </a:solidFill>
+                <a:latin typeface="Arial" panose="020B0604020202020204" pitchFamily="34" charset="0"/>
+                <a:cs typeface="Arial" panose="020B0604020202020204" pitchFamily="34" charset="0"/>
+              </a:rPr>
+              <a:t>Random topology, link number, </a:t>
+            </a:r>
+          </a:p>
+          <a:p>
+            <a:r>
+              <a:rPr lang="en-US" sz="1857" dirty="0">
+                <a:solidFill>
+                  <a:schemeClr val="tx1">
+                    <a:lumMod val="75000"/>
+                    <a:lumOff val="25000"/>
+                  </a:schemeClr>
+                </a:solidFill>
+                <a:latin typeface="Arial" panose="020B0604020202020204" pitchFamily="34" charset="0"/>
+                <a:cs typeface="Arial" panose="020B0604020202020204" pitchFamily="34" charset="0"/>
+              </a:rPr>
+              <a:t>and link length</a:t>
+            </a:r>
+          </a:p>
+        </p:txBody>
+      </p:sp>
     </p:spTree>
     <p:extLst>
       <p:ext uri="{BB962C8B-B14F-4D97-AF65-F5344CB8AC3E}">
